--- a/ERP說明_使用者篇.pptx
+++ b/ERP說明_使用者篇.pptx
@@ -17,7 +17,7 @@
     <p:sldId id="268" r:id="rId5"/>
     <p:sldId id="269" r:id="rId6"/>
     <p:sldId id="270" r:id="rId7"/>
-    <p:sldId id="271" r:id="rId8"/>
+    <p:sldId id="277" r:id="rId8"/>
     <p:sldId id="272" r:id="rId9"/>
     <p:sldId id="273" r:id="rId10"/>
     <p:sldId id="274" r:id="rId11"/>
@@ -136,7 +136,7 @@
             <p14:sldId id="268"/>
             <p14:sldId id="269"/>
             <p14:sldId id="270"/>
-            <p14:sldId id="271"/>
+            <p14:sldId id="277"/>
             <p14:sldId id="272"/>
             <p14:sldId id="273"/>
             <p14:sldId id="274"/>
@@ -250,7 +250,7 @@
           <a:p>
             <a:fld id="{515C5D28-F0D0-4594-A27C-571BA3E96410}" type="datetimeFigureOut">
               <a:rPr lang="zh-TW" altLang="en-US" smtClean="0"/>
-              <a:t>2026/7/6</a:t>
+              <a:t>2026/7/16</a:t>
             </a:fld>
             <a:endParaRPr lang="zh-TW" altLang="en-US"/>
           </a:p>
@@ -427,7 +427,7 @@
           <a:p>
             <a:fld id="{8DC96113-7302-4536-B4C8-A01590DC9D4A}" type="datetimeFigureOut">
               <a:rPr lang="zh-TW" altLang="en-US" smtClean="0"/>
-              <a:t>2026/7/6</a:t>
+              <a:t>2026/7/16</a:t>
             </a:fld>
             <a:endParaRPr lang="zh-TW" altLang="en-US"/>
           </a:p>
@@ -942,39 +942,6 @@
       </p:sp>
       <p:sp>
         <p:nvSpPr>
-          <p:cNvPr id="17" name="Shape 2">
-            <a:extLst>
-              <a:ext uri="{FF2B5EF4-FFF2-40B4-BE49-F238E27FC236}">
-                <a16:creationId xmlns:a16="http://schemas.microsoft.com/office/drawing/2014/main" id="{C73A8D8C-1646-CDF9-1D28-092111247FF0}"/>
-              </a:ext>
-            </a:extLst>
-          </p:cNvPr>
-          <p:cNvSpPr/>
-          <p:nvPr userDrawn="1"/>
-        </p:nvSpPr>
-        <p:spPr>
-          <a:xfrm>
-            <a:off x="1005840" y="1143000"/>
-            <a:ext cx="822960" cy="822960"/>
-          </a:xfrm>
-          <a:prstGeom prst="ellipse">
-            <a:avLst/>
-          </a:prstGeom>
-          <a:solidFill>
-            <a:srgbClr val="065A82"/>
-          </a:solidFill>
-          <a:ln/>
-        </p:spPr>
-        <p:txBody>
-          <a:bodyPr/>
-          <a:lstStyle/>
-          <a:p>
-            <a:endParaRPr lang="zh-TW" altLang="en-US" dirty="0"/>
-          </a:p>
-        </p:txBody>
-      </p:sp>
-      <p:sp>
-        <p:nvSpPr>
           <p:cNvPr id="18" name="Text 3">
             <a:extLst>
               <a:ext uri="{FF2B5EF4-FFF2-40B4-BE49-F238E27FC236}">
@@ -1152,10 +1119,10 @@
       </p:sp>
       <p:sp>
         <p:nvSpPr>
-          <p:cNvPr id="23" name="Shape 9">
-            <a:extLst>
-              <a:ext uri="{FF2B5EF4-FFF2-40B4-BE49-F238E27FC236}">
-                <a16:creationId xmlns:a16="http://schemas.microsoft.com/office/drawing/2014/main" id="{3446C0E3-C395-1BE7-2607-9062466D1363}"/>
+          <p:cNvPr id="3" name="Shape 9">
+            <a:extLst>
+              <a:ext uri="{FF2B5EF4-FFF2-40B4-BE49-F238E27FC236}">
+                <a16:creationId xmlns:a16="http://schemas.microsoft.com/office/drawing/2014/main" id="{86997A6B-0393-7F6D-2DEB-4209AE94D9CE}"/>
               </a:ext>
             </a:extLst>
           </p:cNvPr>
@@ -1171,7 +1138,7 @@
             <a:avLst/>
           </a:prstGeom>
           <a:solidFill>
-            <a:srgbClr val="065A82"/>
+            <a:srgbClr val="D6E6EC"/>
           </a:solidFill>
           <a:ln/>
         </p:spPr>
@@ -1185,10 +1152,10 @@
       </p:sp>
       <p:pic>
         <p:nvPicPr>
-          <p:cNvPr id="24" name="Image 0" descr="preencoded.png">
-            <a:extLst>
-              <a:ext uri="{FF2B5EF4-FFF2-40B4-BE49-F238E27FC236}">
-                <a16:creationId xmlns:a16="http://schemas.microsoft.com/office/drawing/2014/main" id="{14223E60-9E53-DC0A-A72B-04CCB428E194}"/>
+          <p:cNvPr id="8" name="Image 0" descr="preencoded.png">
+            <a:extLst>
+              <a:ext uri="{FF2B5EF4-FFF2-40B4-BE49-F238E27FC236}">
+                <a16:creationId xmlns:a16="http://schemas.microsoft.com/office/drawing/2014/main" id="{DB85E4B2-906F-3945-5304-480485987B55}"/>
               </a:ext>
             </a:extLst>
           </p:cNvPr>
@@ -1216,10 +1183,10 @@
       </p:pic>
       <p:sp>
         <p:nvSpPr>
-          <p:cNvPr id="25" name="Shape 10">
-            <a:extLst>
-              <a:ext uri="{FF2B5EF4-FFF2-40B4-BE49-F238E27FC236}">
-                <a16:creationId xmlns:a16="http://schemas.microsoft.com/office/drawing/2014/main" id="{B2E95F54-8ABB-6DCE-CB30-F5AFAEA3C734}"/>
+          <p:cNvPr id="10" name="Shape 10">
+            <a:extLst>
+              <a:ext uri="{FF2B5EF4-FFF2-40B4-BE49-F238E27FC236}">
+                <a16:creationId xmlns:a16="http://schemas.microsoft.com/office/drawing/2014/main" id="{FBBC2D19-FCF2-6148-DCF8-94C6D832A8EC}"/>
               </a:ext>
             </a:extLst>
           </p:cNvPr>
@@ -1235,7 +1202,7 @@
             <a:avLst/>
           </a:prstGeom>
           <a:solidFill>
-            <a:srgbClr val="065A82"/>
+            <a:srgbClr val="D6E6EC"/>
           </a:solidFill>
           <a:ln/>
         </p:spPr>
@@ -1249,10 +1216,10 @@
       </p:sp>
       <p:pic>
         <p:nvPicPr>
-          <p:cNvPr id="26" name="Image 1" descr="preencoded.png">
-            <a:extLst>
-              <a:ext uri="{FF2B5EF4-FFF2-40B4-BE49-F238E27FC236}">
-                <a16:creationId xmlns:a16="http://schemas.microsoft.com/office/drawing/2014/main" id="{0103C151-E109-6BF2-6DBB-8F46955A1AA7}"/>
+          <p:cNvPr id="12" name="Image 1" descr="preencoded.png">
+            <a:extLst>
+              <a:ext uri="{FF2B5EF4-FFF2-40B4-BE49-F238E27FC236}">
+                <a16:creationId xmlns:a16="http://schemas.microsoft.com/office/drawing/2014/main" id="{F9F95183-DBDF-6F55-39AB-AC8A7B1E5287}"/>
               </a:ext>
             </a:extLst>
           </p:cNvPr>
@@ -1279,10 +1246,10 @@
       </p:pic>
       <p:sp>
         <p:nvSpPr>
-          <p:cNvPr id="27" name="Shape 11">
-            <a:extLst>
-              <a:ext uri="{FF2B5EF4-FFF2-40B4-BE49-F238E27FC236}">
-                <a16:creationId xmlns:a16="http://schemas.microsoft.com/office/drawing/2014/main" id="{B81C9957-F68A-39D5-2594-8C641081DF2E}"/>
+          <p:cNvPr id="14" name="Shape 11">
+            <a:extLst>
+              <a:ext uri="{FF2B5EF4-FFF2-40B4-BE49-F238E27FC236}">
+                <a16:creationId xmlns:a16="http://schemas.microsoft.com/office/drawing/2014/main" id="{0BC319A7-5B6E-6760-6597-4AE75325D6C6}"/>
               </a:ext>
             </a:extLst>
           </p:cNvPr>
@@ -1298,17 +1265,17 @@
             <a:avLst/>
           </a:prstGeom>
           <a:solidFill>
-            <a:srgbClr val="065A82"/>
+            <a:srgbClr val="D6E6EC"/>
           </a:solidFill>
           <a:ln/>
         </p:spPr>
       </p:sp>
       <p:pic>
         <p:nvPicPr>
-          <p:cNvPr id="28" name="Image 2" descr="preencoded.png">
-            <a:extLst>
-              <a:ext uri="{FF2B5EF4-FFF2-40B4-BE49-F238E27FC236}">
-                <a16:creationId xmlns:a16="http://schemas.microsoft.com/office/drawing/2014/main" id="{635CB1F9-56F1-6E7F-2A96-5DE912982C16}"/>
+          <p:cNvPr id="34" name="Image 2" descr="preencoded.png">
+            <a:extLst>
+              <a:ext uri="{FF2B5EF4-FFF2-40B4-BE49-F238E27FC236}">
+                <a16:creationId xmlns:a16="http://schemas.microsoft.com/office/drawing/2014/main" id="{CCE67086-EB0E-D2A1-04B3-1997E4EFD88C}"/>
               </a:ext>
             </a:extLst>
           </p:cNvPr>
@@ -1335,10 +1302,10 @@
       </p:pic>
       <p:sp>
         <p:nvSpPr>
-          <p:cNvPr id="29" name="Shape 12">
-            <a:extLst>
-              <a:ext uri="{FF2B5EF4-FFF2-40B4-BE49-F238E27FC236}">
-                <a16:creationId xmlns:a16="http://schemas.microsoft.com/office/drawing/2014/main" id="{F306B156-2009-AA8E-C559-12305344A0C6}"/>
+          <p:cNvPr id="36" name="Shape 12">
+            <a:extLst>
+              <a:ext uri="{FF2B5EF4-FFF2-40B4-BE49-F238E27FC236}">
+                <a16:creationId xmlns:a16="http://schemas.microsoft.com/office/drawing/2014/main" id="{B7367D9C-3827-C964-E11E-A7A05A2462EB}"/>
               </a:ext>
             </a:extLst>
           </p:cNvPr>
@@ -1354,17 +1321,17 @@
             <a:avLst/>
           </a:prstGeom>
           <a:solidFill>
-            <a:srgbClr val="065A82"/>
+            <a:srgbClr val="D6E6EC"/>
           </a:solidFill>
           <a:ln/>
         </p:spPr>
       </p:sp>
       <p:pic>
         <p:nvPicPr>
-          <p:cNvPr id="30" name="Image 3" descr="preencoded.png">
-            <a:extLst>
-              <a:ext uri="{FF2B5EF4-FFF2-40B4-BE49-F238E27FC236}">
-                <a16:creationId xmlns:a16="http://schemas.microsoft.com/office/drawing/2014/main" id="{BBA4EB60-8867-F0A9-0B90-A56C6F0D5D58}"/>
+          <p:cNvPr id="38" name="Image 3" descr="preencoded.png">
+            <a:extLst>
+              <a:ext uri="{FF2B5EF4-FFF2-40B4-BE49-F238E27FC236}">
+                <a16:creationId xmlns:a16="http://schemas.microsoft.com/office/drawing/2014/main" id="{3ECDEAC1-5FA1-B757-7C68-1DE06B7A1021}"/>
               </a:ext>
             </a:extLst>
           </p:cNvPr>
@@ -1391,10 +1358,10 @@
       </p:pic>
       <p:sp>
         <p:nvSpPr>
-          <p:cNvPr id="31" name="Shape 13">
-            <a:extLst>
-              <a:ext uri="{FF2B5EF4-FFF2-40B4-BE49-F238E27FC236}">
-                <a16:creationId xmlns:a16="http://schemas.microsoft.com/office/drawing/2014/main" id="{C1A6C0BD-ED12-01DB-3362-DC74C30CB9B0}"/>
+          <p:cNvPr id="40" name="Shape 13">
+            <a:extLst>
+              <a:ext uri="{FF2B5EF4-FFF2-40B4-BE49-F238E27FC236}">
+                <a16:creationId xmlns:a16="http://schemas.microsoft.com/office/drawing/2014/main" id="{54A98BF9-344D-D5B6-0572-10D66EEAD673}"/>
               </a:ext>
             </a:extLst>
           </p:cNvPr>
@@ -1410,17 +1377,17 @@
             <a:avLst/>
           </a:prstGeom>
           <a:solidFill>
-            <a:srgbClr val="065A82"/>
+            <a:srgbClr val="D6E6EC"/>
           </a:solidFill>
           <a:ln/>
         </p:spPr>
       </p:sp>
       <p:pic>
         <p:nvPicPr>
-          <p:cNvPr id="32" name="Image 4" descr="preencoded.png">
-            <a:extLst>
-              <a:ext uri="{FF2B5EF4-FFF2-40B4-BE49-F238E27FC236}">
-                <a16:creationId xmlns:a16="http://schemas.microsoft.com/office/drawing/2014/main" id="{308BC347-D775-22A8-09D4-A1A17FB6C485}"/>
+          <p:cNvPr id="42" name="Image 4" descr="preencoded.png">
+            <a:extLst>
+              <a:ext uri="{FF2B5EF4-FFF2-40B4-BE49-F238E27FC236}">
+                <a16:creationId xmlns:a16="http://schemas.microsoft.com/office/drawing/2014/main" id="{B585ED91-3849-6C3C-DF2E-C6B940931A20}"/>
               </a:ext>
             </a:extLst>
           </p:cNvPr>
@@ -2024,7 +1991,7 @@
                 <a:ea typeface="微軟正黑體" panose="020B0604030504040204" pitchFamily="34" charset="-120"/>
                 <a:cs typeface="Calibri" pitchFamily="34" charset="-120"/>
               </a:rPr>
-              <a:t>系統說明書</a:t>
+              <a:t>系統 客戶操作指南</a:t>
             </a:r>
           </a:p>
         </p:txBody>
@@ -2073,32 +2040,6 @@
             </a:endParaRPr>
           </a:p>
         </p:txBody>
-      </p:sp>
-      <p:sp>
-        <p:nvSpPr>
-          <p:cNvPr id="12" name="Shape 0">
-            <a:extLst>
-              <a:ext uri="{FF2B5EF4-FFF2-40B4-BE49-F238E27FC236}">
-                <a16:creationId xmlns:a16="http://schemas.microsoft.com/office/drawing/2014/main" id="{FFA9774C-F6C4-15AE-410D-3416AC460770}"/>
-              </a:ext>
-            </a:extLst>
-          </p:cNvPr>
-          <p:cNvSpPr/>
-          <p:nvPr userDrawn="1"/>
-        </p:nvSpPr>
-        <p:spPr>
-          <a:xfrm>
-            <a:off x="585216" y="539496"/>
-            <a:ext cx="658368" cy="658368"/>
-          </a:xfrm>
-          <a:prstGeom prst="ellipse">
-            <a:avLst/>
-          </a:prstGeom>
-          <a:solidFill>
-            <a:srgbClr val="E6F1F5"/>
-          </a:solidFill>
-          <a:ln/>
-        </p:spPr>
       </p:sp>
     </p:spTree>
     <p:extLst>
@@ -2302,7 +2243,7 @@
                 <a:ea typeface="微軟正黑體" panose="020B0604030504040204" pitchFamily="34" charset="-120"/>
                 <a:cs typeface="Calibri" pitchFamily="34" charset="-120"/>
               </a:rPr>
-              <a:t>系統說明書</a:t>
+              <a:t>系統 客戶操作指南</a:t>
             </a:r>
           </a:p>
         </p:txBody>
@@ -2417,32 +2358,6 @@
             </a:endParaRPr>
           </a:p>
         </p:txBody>
-      </p:sp>
-      <p:sp>
-        <p:nvSpPr>
-          <p:cNvPr id="12" name="Shape 0">
-            <a:extLst>
-              <a:ext uri="{FF2B5EF4-FFF2-40B4-BE49-F238E27FC236}">
-                <a16:creationId xmlns:a16="http://schemas.microsoft.com/office/drawing/2014/main" id="{FFA9774C-F6C4-15AE-410D-3416AC460770}"/>
-              </a:ext>
-            </a:extLst>
-          </p:cNvPr>
-          <p:cNvSpPr/>
-          <p:nvPr userDrawn="1"/>
-        </p:nvSpPr>
-        <p:spPr>
-          <a:xfrm>
-            <a:off x="585216" y="539496"/>
-            <a:ext cx="658368" cy="658368"/>
-          </a:xfrm>
-          <a:prstGeom prst="ellipse">
-            <a:avLst/>
-          </a:prstGeom>
-          <a:solidFill>
-            <a:srgbClr val="E6F1F5"/>
-          </a:solidFill>
-          <a:ln/>
-        </p:spPr>
       </p:sp>
     </p:spTree>
     <p:extLst>
@@ -2646,7 +2561,7 @@
                 <a:ea typeface="微軟正黑體" panose="020B0604030504040204" pitchFamily="34" charset="-120"/>
                 <a:cs typeface="Calibri" pitchFamily="34" charset="-120"/>
               </a:rPr>
-              <a:t>系統說明書</a:t>
+              <a:t>系統 客戶操作指南</a:t>
             </a:r>
           </a:p>
         </p:txBody>
@@ -2761,32 +2676,6 @@
             </a:endParaRPr>
           </a:p>
         </p:txBody>
-      </p:sp>
-      <p:sp>
-        <p:nvSpPr>
-          <p:cNvPr id="5" name="Shape 0">
-            <a:extLst>
-              <a:ext uri="{FF2B5EF4-FFF2-40B4-BE49-F238E27FC236}">
-                <a16:creationId xmlns:a16="http://schemas.microsoft.com/office/drawing/2014/main" id="{D70D0DDC-4F89-6149-23BF-ABA1536EEF9F}"/>
-              </a:ext>
-            </a:extLst>
-          </p:cNvPr>
-          <p:cNvSpPr/>
-          <p:nvPr userDrawn="1"/>
-        </p:nvSpPr>
-        <p:spPr>
-          <a:xfrm>
-            <a:off x="585216" y="539496"/>
-            <a:ext cx="658368" cy="658368"/>
-          </a:xfrm>
-          <a:prstGeom prst="ellipse">
-            <a:avLst/>
-          </a:prstGeom>
-          <a:solidFill>
-            <a:srgbClr val="FFFBEB"/>
-          </a:solidFill>
-          <a:ln/>
-        </p:spPr>
       </p:sp>
     </p:spTree>
     <p:extLst>
@@ -3128,10 +3017,10 @@
       </p:sp>
       <p:sp>
         <p:nvSpPr>
-          <p:cNvPr id="36" name="Shape 9">
-            <a:extLst>
-              <a:ext uri="{FF2B5EF4-FFF2-40B4-BE49-F238E27FC236}">
-                <a16:creationId xmlns:a16="http://schemas.microsoft.com/office/drawing/2014/main" id="{0DEF6004-0482-55D6-EC95-EED1A8E7D1F1}"/>
+          <p:cNvPr id="3" name="Shape 9">
+            <a:extLst>
+              <a:ext uri="{FF2B5EF4-FFF2-40B4-BE49-F238E27FC236}">
+                <a16:creationId xmlns:a16="http://schemas.microsoft.com/office/drawing/2014/main" id="{879F42C4-5C70-D121-0DED-AF0FF3E09EC4}"/>
               </a:ext>
             </a:extLst>
           </p:cNvPr>
@@ -3147,7 +3036,7 @@
             <a:avLst/>
           </a:prstGeom>
           <a:solidFill>
-            <a:srgbClr val="065A82"/>
+            <a:srgbClr val="D6E6EC"/>
           </a:solidFill>
           <a:ln/>
         </p:spPr>
@@ -3161,10 +3050,10 @@
       </p:sp>
       <p:pic>
         <p:nvPicPr>
-          <p:cNvPr id="37" name="Image 0" descr="preencoded.png">
-            <a:extLst>
-              <a:ext uri="{FF2B5EF4-FFF2-40B4-BE49-F238E27FC236}">
-                <a16:creationId xmlns:a16="http://schemas.microsoft.com/office/drawing/2014/main" id="{A0F58C09-86AE-D8EF-09F4-5063735D7176}"/>
+          <p:cNvPr id="5" name="Image 0" descr="preencoded.png">
+            <a:extLst>
+              <a:ext uri="{FF2B5EF4-FFF2-40B4-BE49-F238E27FC236}">
+                <a16:creationId xmlns:a16="http://schemas.microsoft.com/office/drawing/2014/main" id="{5D0F6893-F753-A19B-5AE4-35E65E0D54F7}"/>
               </a:ext>
             </a:extLst>
           </p:cNvPr>
@@ -3192,10 +3081,10 @@
       </p:pic>
       <p:sp>
         <p:nvSpPr>
-          <p:cNvPr id="38" name="Shape 10">
-            <a:extLst>
-              <a:ext uri="{FF2B5EF4-FFF2-40B4-BE49-F238E27FC236}">
-                <a16:creationId xmlns:a16="http://schemas.microsoft.com/office/drawing/2014/main" id="{BD5292F5-C03D-6C8B-93E4-353F32C5C1F3}"/>
+          <p:cNvPr id="7" name="Shape 10">
+            <a:extLst>
+              <a:ext uri="{FF2B5EF4-FFF2-40B4-BE49-F238E27FC236}">
+                <a16:creationId xmlns:a16="http://schemas.microsoft.com/office/drawing/2014/main" id="{6CFF2C59-B702-A10D-70CB-2EB9C57C8E75}"/>
               </a:ext>
             </a:extLst>
           </p:cNvPr>
@@ -3211,7 +3100,7 @@
             <a:avLst/>
           </a:prstGeom>
           <a:solidFill>
-            <a:srgbClr val="065A82"/>
+            <a:srgbClr val="D6E6EC"/>
           </a:solidFill>
           <a:ln/>
         </p:spPr>
@@ -3225,10 +3114,10 @@
       </p:sp>
       <p:pic>
         <p:nvPicPr>
-          <p:cNvPr id="39" name="Image 1" descr="preencoded.png">
-            <a:extLst>
-              <a:ext uri="{FF2B5EF4-FFF2-40B4-BE49-F238E27FC236}">
-                <a16:creationId xmlns:a16="http://schemas.microsoft.com/office/drawing/2014/main" id="{F8762BD0-522D-E77D-A949-27CEA3516268}"/>
+          <p:cNvPr id="9" name="Image 1" descr="preencoded.png">
+            <a:extLst>
+              <a:ext uri="{FF2B5EF4-FFF2-40B4-BE49-F238E27FC236}">
+                <a16:creationId xmlns:a16="http://schemas.microsoft.com/office/drawing/2014/main" id="{3C451A5E-9C19-7B58-46B3-A654EF6C5504}"/>
               </a:ext>
             </a:extLst>
           </p:cNvPr>
@@ -3255,10 +3144,10 @@
       </p:pic>
       <p:sp>
         <p:nvSpPr>
-          <p:cNvPr id="40" name="Shape 11">
-            <a:extLst>
-              <a:ext uri="{FF2B5EF4-FFF2-40B4-BE49-F238E27FC236}">
-                <a16:creationId xmlns:a16="http://schemas.microsoft.com/office/drawing/2014/main" id="{A61E17C2-00BB-8955-6496-C2E20AE29BF7}"/>
+          <p:cNvPr id="11" name="Shape 11">
+            <a:extLst>
+              <a:ext uri="{FF2B5EF4-FFF2-40B4-BE49-F238E27FC236}">
+                <a16:creationId xmlns:a16="http://schemas.microsoft.com/office/drawing/2014/main" id="{45FF00D6-7B1E-5C93-B140-D49E45AF56AC}"/>
               </a:ext>
             </a:extLst>
           </p:cNvPr>
@@ -3274,17 +3163,17 @@
             <a:avLst/>
           </a:prstGeom>
           <a:solidFill>
-            <a:srgbClr val="065A82"/>
+            <a:srgbClr val="D6E6EC"/>
           </a:solidFill>
           <a:ln/>
         </p:spPr>
       </p:sp>
       <p:pic>
         <p:nvPicPr>
-          <p:cNvPr id="41" name="Image 2" descr="preencoded.png">
-            <a:extLst>
-              <a:ext uri="{FF2B5EF4-FFF2-40B4-BE49-F238E27FC236}">
-                <a16:creationId xmlns:a16="http://schemas.microsoft.com/office/drawing/2014/main" id="{74F67410-1BDC-9D9A-621C-571F46159C48}"/>
+          <p:cNvPr id="13" name="Image 2" descr="preencoded.png">
+            <a:extLst>
+              <a:ext uri="{FF2B5EF4-FFF2-40B4-BE49-F238E27FC236}">
+                <a16:creationId xmlns:a16="http://schemas.microsoft.com/office/drawing/2014/main" id="{210EDC34-40EF-538D-2C4E-42DB23011503}"/>
               </a:ext>
             </a:extLst>
           </p:cNvPr>
@@ -3311,10 +3200,10 @@
       </p:pic>
       <p:sp>
         <p:nvSpPr>
-          <p:cNvPr id="42" name="Shape 12">
-            <a:extLst>
-              <a:ext uri="{FF2B5EF4-FFF2-40B4-BE49-F238E27FC236}">
-                <a16:creationId xmlns:a16="http://schemas.microsoft.com/office/drawing/2014/main" id="{C6E0FB02-E1D9-CB8B-2744-762E3E613EE2}"/>
+          <p:cNvPr id="15" name="Shape 12">
+            <a:extLst>
+              <a:ext uri="{FF2B5EF4-FFF2-40B4-BE49-F238E27FC236}">
+                <a16:creationId xmlns:a16="http://schemas.microsoft.com/office/drawing/2014/main" id="{E9F1DE5A-5C5B-F7DF-C26C-311125E5F5E1}"/>
               </a:ext>
             </a:extLst>
           </p:cNvPr>
@@ -3330,17 +3219,17 @@
             <a:avLst/>
           </a:prstGeom>
           <a:solidFill>
-            <a:srgbClr val="065A82"/>
+            <a:srgbClr val="D6E6EC"/>
           </a:solidFill>
           <a:ln/>
         </p:spPr>
       </p:sp>
       <p:pic>
         <p:nvPicPr>
-          <p:cNvPr id="43" name="Image 3" descr="preencoded.png">
-            <a:extLst>
-              <a:ext uri="{FF2B5EF4-FFF2-40B4-BE49-F238E27FC236}">
-                <a16:creationId xmlns:a16="http://schemas.microsoft.com/office/drawing/2014/main" id="{DA947427-63E7-CA8D-9294-622632B8E5AF}"/>
+          <p:cNvPr id="17" name="Image 3" descr="preencoded.png">
+            <a:extLst>
+              <a:ext uri="{FF2B5EF4-FFF2-40B4-BE49-F238E27FC236}">
+                <a16:creationId xmlns:a16="http://schemas.microsoft.com/office/drawing/2014/main" id="{D3871603-35BD-1BEB-5890-1CB19196369E}"/>
               </a:ext>
             </a:extLst>
           </p:cNvPr>
@@ -3367,10 +3256,10 @@
       </p:pic>
       <p:sp>
         <p:nvSpPr>
-          <p:cNvPr id="44" name="Shape 13">
-            <a:extLst>
-              <a:ext uri="{FF2B5EF4-FFF2-40B4-BE49-F238E27FC236}">
-                <a16:creationId xmlns:a16="http://schemas.microsoft.com/office/drawing/2014/main" id="{71BA7FB5-DF12-7664-ABE6-FD9A2415BC15}"/>
+          <p:cNvPr id="19" name="Shape 13">
+            <a:extLst>
+              <a:ext uri="{FF2B5EF4-FFF2-40B4-BE49-F238E27FC236}">
+                <a16:creationId xmlns:a16="http://schemas.microsoft.com/office/drawing/2014/main" id="{3445F895-A335-35E0-1A3A-C54229A11277}"/>
               </a:ext>
             </a:extLst>
           </p:cNvPr>
@@ -3386,17 +3275,17 @@
             <a:avLst/>
           </a:prstGeom>
           <a:solidFill>
-            <a:srgbClr val="065A82"/>
+            <a:srgbClr val="D6E6EC"/>
           </a:solidFill>
           <a:ln/>
         </p:spPr>
       </p:sp>
       <p:pic>
         <p:nvPicPr>
-          <p:cNvPr id="45" name="Image 4" descr="preencoded.png">
-            <a:extLst>
-              <a:ext uri="{FF2B5EF4-FFF2-40B4-BE49-F238E27FC236}">
-                <a16:creationId xmlns:a16="http://schemas.microsoft.com/office/drawing/2014/main" id="{6C30F520-8983-F009-D4DA-AC28A6ED4034}"/>
+          <p:cNvPr id="21" name="Image 4" descr="preencoded.png">
+            <a:extLst>
+              <a:ext uri="{FF2B5EF4-FFF2-40B4-BE49-F238E27FC236}">
+                <a16:creationId xmlns:a16="http://schemas.microsoft.com/office/drawing/2014/main" id="{A5814A84-226A-76A8-F01A-8581E9F4356F}"/>
               </a:ext>
             </a:extLst>
           </p:cNvPr>
@@ -4018,7 +3907,7 @@
               <a:buNone/>
             </a:pPr>
             <a:r>
-              <a:rPr lang="en-US" sz="4400" b="1" dirty="0">
+              <a:rPr lang="en-US" sz="4400" b="1" dirty="0" err="1">
                 <a:solidFill>
                   <a:srgbClr val="FFFFFF"/>
                 </a:solidFill>
@@ -4026,7 +3915,7 @@
                 <a:ea typeface="微軟正黑體" panose="020B0604030504040204" pitchFamily="34" charset="-120"/>
                 <a:cs typeface="Cambria" pitchFamily="34" charset="-120"/>
               </a:rPr>
-              <a:t>簡易ERP系統 使用說明書</a:t>
+              <a:t>簡易ERP系統</a:t>
             </a:r>
             <a:endParaRPr lang="en-US" sz="4400" dirty="0">
               <a:latin typeface="微軟正黑體" panose="020B0604030504040204" pitchFamily="34" charset="-120"/>
@@ -4062,9 +3951,39 @@
           <a:bodyPr wrap="square" rtlCol="0" anchor="ctr"/>
           <a:lstStyle/>
           <a:p>
-            <a:pPr marL="0" indent="0">
-              <a:buNone/>
-            </a:pPr>
+            <a:r>
+              <a:rPr lang="zh-TW" altLang="en-US" sz="2000" dirty="0">
+                <a:solidFill>
+                  <a:srgbClr val="C7DCE6"/>
+                </a:solidFill>
+                <a:latin typeface="微軟正黑體" panose="020B0604030504040204" pitchFamily="34" charset="-120"/>
+                <a:ea typeface="微軟正黑體" panose="020B0604030504040204" pitchFamily="34" charset="-120"/>
+                <a:cs typeface="Calibri" pitchFamily="34" charset="-120"/>
+              </a:rPr>
+              <a:t>使用說明書 </a:t>
+            </a:r>
+            <a:r>
+              <a:rPr lang="en-US" altLang="zh-TW" sz="2000" dirty="0">
+                <a:solidFill>
+                  <a:srgbClr val="C7DCE6"/>
+                </a:solidFill>
+                <a:latin typeface="微軟正黑體" panose="020B0604030504040204" pitchFamily="34" charset="-120"/>
+                <a:ea typeface="微軟正黑體" panose="020B0604030504040204" pitchFamily="34" charset="-120"/>
+                <a:cs typeface="Calibri" pitchFamily="34" charset="-120"/>
+              </a:rPr>
+              <a:t>·</a:t>
+            </a:r>
+            <a:r>
+              <a:rPr lang="zh-TW" altLang="en-US" sz="2000" dirty="0">
+                <a:solidFill>
+                  <a:srgbClr val="C7DCE6"/>
+                </a:solidFill>
+                <a:latin typeface="微軟正黑體" panose="020B0604030504040204" pitchFamily="34" charset="-120"/>
+                <a:ea typeface="微軟正黑體" panose="020B0604030504040204" pitchFamily="34" charset="-120"/>
+                <a:cs typeface="Calibri" pitchFamily="34" charset="-120"/>
+              </a:rPr>
+              <a:t> </a:t>
+            </a:r>
             <a:r>
               <a:rPr lang="en-US" sz="2000" dirty="0" err="1">
                 <a:solidFill>
@@ -4233,94 +4152,6 @@
       </p:sp>
       <p:sp>
         <p:nvSpPr>
-          <p:cNvPr id="3" name="Text 1">
-            <a:extLst>
-              <a:ext uri="{FF2B5EF4-FFF2-40B4-BE49-F238E27FC236}">
-                <a16:creationId xmlns:a16="http://schemas.microsoft.com/office/drawing/2014/main" id="{668361F9-B1E6-2688-8942-7FB638A5E2BE}"/>
-              </a:ext>
-            </a:extLst>
-          </p:cNvPr>
-          <p:cNvSpPr/>
-          <p:nvPr/>
-        </p:nvSpPr>
-        <p:spPr>
-          <a:xfrm>
-            <a:off x="1432408" y="438912"/>
-            <a:ext cx="9144000" cy="320040"/>
-          </a:xfrm>
-          <a:prstGeom prst="rect">
-            <a:avLst/>
-          </a:prstGeom>
-          <a:noFill/>
-          <a:ln/>
-        </p:spPr>
-        <p:txBody>
-          <a:bodyPr wrap="square" rtlCol="0" anchor="ctr"/>
-          <a:lstStyle/>
-          <a:p>
-            <a:pPr marL="0" indent="0">
-              <a:buNone/>
-            </a:pPr>
-            <a:r>
-              <a:rPr lang="en-US" sz="1300" b="1" kern="0" spc="100" dirty="0">
-                <a:solidFill>
-                  <a:srgbClr val="CC6600"/>
-                </a:solidFill>
-                <a:latin typeface="微軟正黑體" panose="020B0604030504040204" pitchFamily="34" charset="-120"/>
-                <a:ea typeface="微軟正黑體" panose="020B0604030504040204" pitchFamily="34" charset="-120"/>
-                <a:cs typeface="Calibri" pitchFamily="34" charset="-120"/>
-              </a:rPr>
-              <a:t>TRANSFER ORDER</a:t>
-            </a:r>
-          </a:p>
-        </p:txBody>
-      </p:sp>
-      <p:sp>
-        <p:nvSpPr>
-          <p:cNvPr id="4" name="Text 2">
-            <a:extLst>
-              <a:ext uri="{FF2B5EF4-FFF2-40B4-BE49-F238E27FC236}">
-                <a16:creationId xmlns:a16="http://schemas.microsoft.com/office/drawing/2014/main" id="{C7580C67-6BB7-5DE2-B3DB-6EF5F48EEF4B}"/>
-              </a:ext>
-            </a:extLst>
-          </p:cNvPr>
-          <p:cNvSpPr/>
-          <p:nvPr/>
-        </p:nvSpPr>
-        <p:spPr>
-          <a:xfrm>
-            <a:off x="1432408" y="722376"/>
-            <a:ext cx="9601200" cy="548640"/>
-          </a:xfrm>
-          <a:prstGeom prst="rect">
-            <a:avLst/>
-          </a:prstGeom>
-          <a:noFill/>
-          <a:ln/>
-        </p:spPr>
-        <p:txBody>
-          <a:bodyPr wrap="square" rtlCol="0" anchor="ctr"/>
-          <a:lstStyle/>
-          <a:p>
-            <a:pPr marL="0" indent="0">
-              <a:buNone/>
-            </a:pPr>
-            <a:r>
-              <a:rPr lang="zh-TW" altLang="en-US" sz="2800" b="1" dirty="0">
-                <a:solidFill>
-                  <a:srgbClr val="1E293B"/>
-                </a:solidFill>
-                <a:latin typeface="微軟正黑體" panose="020B0604030504040204" pitchFamily="34" charset="-120"/>
-                <a:ea typeface="微軟正黑體" panose="020B0604030504040204" pitchFamily="34" charset="-120"/>
-                <a:cs typeface="Cambria" pitchFamily="34" charset="-120"/>
-              </a:rPr>
-              <a:t>調撥單</a:t>
-            </a:r>
-          </a:p>
-        </p:txBody>
-      </p:sp>
-      <p:sp>
-        <p:nvSpPr>
           <p:cNvPr id="5" name="Shape 4">
             <a:extLst>
               <a:ext uri="{FF2B5EF4-FFF2-40B4-BE49-F238E27FC236}">
@@ -5031,36 +4862,88 @@
           </a:p>
         </p:txBody>
       </p:sp>
-      <p:pic>
-        <p:nvPicPr>
-          <p:cNvPr id="24" name="Image 0" descr="preencoded.png">
-            <a:extLst>
-              <a:ext uri="{FF2B5EF4-FFF2-40B4-BE49-F238E27FC236}">
-                <a16:creationId xmlns:a16="http://schemas.microsoft.com/office/drawing/2014/main" id="{9E77F8E2-560E-7BA9-587B-02A3F13B73C5}"/>
-              </a:ext>
-            </a:extLst>
-          </p:cNvPr>
-          <p:cNvPicPr>
-            <a:picLocks noChangeAspect="1"/>
-          </p:cNvPicPr>
-          <p:nvPr/>
-        </p:nvPicPr>
-        <p:blipFill>
-          <a:blip r:embed="rId3"/>
-          <a:stretch>
-            <a:fillRect/>
-          </a:stretch>
-        </p:blipFill>
-        <p:spPr>
-          <a:xfrm>
-            <a:off x="716287" y="687396"/>
-            <a:ext cx="384048" cy="384048"/>
-          </a:xfrm>
-          <a:prstGeom prst="rect">
-            <a:avLst/>
-          </a:prstGeom>
-        </p:spPr>
-      </p:pic>
+      <p:sp>
+        <p:nvSpPr>
+          <p:cNvPr id="21" name="Text 1">
+            <a:extLst>
+              <a:ext uri="{FF2B5EF4-FFF2-40B4-BE49-F238E27FC236}">
+                <a16:creationId xmlns:a16="http://schemas.microsoft.com/office/drawing/2014/main" id="{6843688E-5BB2-3653-C5FB-F278DC1E71E6}"/>
+              </a:ext>
+            </a:extLst>
+          </p:cNvPr>
+          <p:cNvSpPr/>
+          <p:nvPr/>
+        </p:nvSpPr>
+        <p:spPr>
+          <a:xfrm>
+            <a:off x="792328" y="515112"/>
+            <a:ext cx="9784080" cy="320040"/>
+          </a:xfrm>
+          <a:prstGeom prst="rect">
+            <a:avLst/>
+          </a:prstGeom>
+          <a:noFill/>
+          <a:ln/>
+        </p:spPr>
+        <p:txBody>
+          <a:bodyPr wrap="square" rtlCol="0" anchor="ctr"/>
+          <a:lstStyle/>
+          <a:p>
+            <a:r>
+              <a:rPr lang="en-US" altLang="zh-TW" sz="1200" b="1" kern="0" spc="100" dirty="0">
+                <a:solidFill>
+                  <a:srgbClr val="CC6600"/>
+                </a:solidFill>
+                <a:latin typeface="微軟正黑體" panose="020B0604030504040204" pitchFamily="34" charset="-120"/>
+                <a:ea typeface="微軟正黑體" panose="020B0604030504040204" pitchFamily="34" charset="-120"/>
+                <a:cs typeface="Calibri" pitchFamily="34" charset="-120"/>
+              </a:rPr>
+              <a:t>TRANSFER ORDER</a:t>
+            </a:r>
+          </a:p>
+        </p:txBody>
+      </p:sp>
+      <p:sp>
+        <p:nvSpPr>
+          <p:cNvPr id="23" name="Text 2">
+            <a:extLst>
+              <a:ext uri="{FF2B5EF4-FFF2-40B4-BE49-F238E27FC236}">
+                <a16:creationId xmlns:a16="http://schemas.microsoft.com/office/drawing/2014/main" id="{A33DFD54-F086-27F8-B8AB-312D3F1B964D}"/>
+              </a:ext>
+            </a:extLst>
+          </p:cNvPr>
+          <p:cNvSpPr/>
+          <p:nvPr/>
+        </p:nvSpPr>
+        <p:spPr>
+          <a:xfrm>
+            <a:off x="792328" y="823976"/>
+            <a:ext cx="10241280" cy="548640"/>
+          </a:xfrm>
+          <a:prstGeom prst="rect">
+            <a:avLst/>
+          </a:prstGeom>
+          <a:noFill/>
+          <a:ln/>
+        </p:spPr>
+        <p:txBody>
+          <a:bodyPr wrap="square" rtlCol="0" anchor="ctr"/>
+          <a:lstStyle/>
+          <a:p>
+            <a:r>
+              <a:rPr lang="zh-TW" altLang="en-US" sz="2800" b="1" dirty="0">
+                <a:solidFill>
+                  <a:srgbClr val="1E293B"/>
+                </a:solidFill>
+                <a:latin typeface="微軟正黑體" panose="020B0604030504040204" pitchFamily="34" charset="-120"/>
+                <a:ea typeface="微軟正黑體" panose="020B0604030504040204" pitchFamily="34" charset="-120"/>
+                <a:cs typeface="Cambria" pitchFamily="34" charset="-120"/>
+              </a:rPr>
+              <a:t>調撥單</a:t>
+            </a:r>
+          </a:p>
+        </p:txBody>
+      </p:sp>
     </p:spTree>
     <p:extLst>
       <p:ext uri="{BB962C8B-B14F-4D97-AF65-F5344CB8AC3E}">
@@ -5124,94 +5007,6 @@
           </a:p>
         </p:txBody>
       </p:sp>
-      <p:sp>
-        <p:nvSpPr>
-          <p:cNvPr id="3" name="Text 1">
-            <a:extLst>
-              <a:ext uri="{FF2B5EF4-FFF2-40B4-BE49-F238E27FC236}">
-                <a16:creationId xmlns:a16="http://schemas.microsoft.com/office/drawing/2014/main" id="{37B8C98F-70E3-6D70-8B9E-6EAAECD1C1EC}"/>
-              </a:ext>
-            </a:extLst>
-          </p:cNvPr>
-          <p:cNvSpPr/>
-          <p:nvPr/>
-        </p:nvSpPr>
-        <p:spPr>
-          <a:xfrm>
-            <a:off x="1432408" y="438912"/>
-            <a:ext cx="9144000" cy="320040"/>
-          </a:xfrm>
-          <a:prstGeom prst="rect">
-            <a:avLst/>
-          </a:prstGeom>
-          <a:noFill/>
-          <a:ln/>
-        </p:spPr>
-        <p:txBody>
-          <a:bodyPr wrap="square" rtlCol="0" anchor="ctr"/>
-          <a:lstStyle/>
-          <a:p>
-            <a:pPr marL="0" indent="0">
-              <a:buNone/>
-            </a:pPr>
-            <a:r>
-              <a:rPr lang="en-US" sz="1300" b="1" kern="0" spc="100" dirty="0">
-                <a:solidFill>
-                  <a:srgbClr val="CC6600"/>
-                </a:solidFill>
-                <a:latin typeface="微軟正黑體" panose="020B0604030504040204" pitchFamily="34" charset="-120"/>
-                <a:ea typeface="微軟正黑體" panose="020B0604030504040204" pitchFamily="34" charset="-120"/>
-                <a:cs typeface="Calibri" pitchFamily="34" charset="-120"/>
-              </a:rPr>
-              <a:t>TRANSFER ORDER</a:t>
-            </a:r>
-          </a:p>
-        </p:txBody>
-      </p:sp>
-      <p:sp>
-        <p:nvSpPr>
-          <p:cNvPr id="4" name="Text 2">
-            <a:extLst>
-              <a:ext uri="{FF2B5EF4-FFF2-40B4-BE49-F238E27FC236}">
-                <a16:creationId xmlns:a16="http://schemas.microsoft.com/office/drawing/2014/main" id="{9AD6B552-7172-F2FC-9829-92046F165F76}"/>
-              </a:ext>
-            </a:extLst>
-          </p:cNvPr>
-          <p:cNvSpPr/>
-          <p:nvPr/>
-        </p:nvSpPr>
-        <p:spPr>
-          <a:xfrm>
-            <a:off x="1432408" y="722376"/>
-            <a:ext cx="9601200" cy="548640"/>
-          </a:xfrm>
-          <a:prstGeom prst="rect">
-            <a:avLst/>
-          </a:prstGeom>
-          <a:noFill/>
-          <a:ln/>
-        </p:spPr>
-        <p:txBody>
-          <a:bodyPr wrap="square" rtlCol="0" anchor="ctr"/>
-          <a:lstStyle/>
-          <a:p>
-            <a:pPr marL="0" indent="0">
-              <a:buNone/>
-            </a:pPr>
-            <a:r>
-              <a:rPr lang="zh-TW" altLang="en-US" sz="2800" b="1" dirty="0">
-                <a:solidFill>
-                  <a:srgbClr val="1E293B"/>
-                </a:solidFill>
-                <a:latin typeface="微軟正黑體" panose="020B0604030504040204" pitchFamily="34" charset="-120"/>
-                <a:ea typeface="微軟正黑體" panose="020B0604030504040204" pitchFamily="34" charset="-120"/>
-                <a:cs typeface="Cambria" pitchFamily="34" charset="-120"/>
-              </a:rPr>
-              <a:t>常見防呆訊息對照表</a:t>
-            </a:r>
-          </a:p>
-        </p:txBody>
-      </p:sp>
       <p:graphicFrame>
         <p:nvGraphicFramePr>
           <p:cNvPr id="5" name="Table 0">
@@ -5224,13 +5019,7 @@
           <p:cNvGraphicFramePr>
             <a:graphicFrameLocks noGrp="1"/>
           </p:cNvGraphicFramePr>
-          <p:nvPr>
-            <p:extLst>
-              <p:ext uri="{D42A27DB-BD31-4B8C-83A1-F6EECF244321}">
-                <p14:modId xmlns:p14="http://schemas.microsoft.com/office/powerpoint/2010/main" val="299786165"/>
-              </p:ext>
-            </p:extLst>
-          </p:nvPr>
+          <p:nvPr/>
         </p:nvGraphicFramePr>
         <p:xfrm>
           <a:off x="548640" y="1783080"/>
@@ -6773,36 +6562,110 @@
           </a:graphicData>
         </a:graphic>
       </p:graphicFrame>
-      <p:pic>
-        <p:nvPicPr>
-          <p:cNvPr id="6" name="Image 0" descr="preencoded.png">
-            <a:extLst>
-              <a:ext uri="{FF2B5EF4-FFF2-40B4-BE49-F238E27FC236}">
-                <a16:creationId xmlns:a16="http://schemas.microsoft.com/office/drawing/2014/main" id="{CAEF1E1A-3217-4108-FCE5-95B023FFF392}"/>
-              </a:ext>
-            </a:extLst>
-          </p:cNvPr>
-          <p:cNvPicPr>
-            <a:picLocks noChangeAspect="1"/>
-          </p:cNvPicPr>
-          <p:nvPr/>
-        </p:nvPicPr>
-        <p:blipFill>
-          <a:blip r:embed="rId2"/>
-          <a:stretch>
-            <a:fillRect/>
-          </a:stretch>
-        </p:blipFill>
-        <p:spPr>
-          <a:xfrm>
-            <a:off x="693524" y="656598"/>
-            <a:ext cx="420624" cy="420624"/>
-          </a:xfrm>
-          <a:prstGeom prst="rect">
-            <a:avLst/>
-          </a:prstGeom>
-        </p:spPr>
-      </p:pic>
+      <p:sp>
+        <p:nvSpPr>
+          <p:cNvPr id="8" name="Text 1">
+            <a:extLst>
+              <a:ext uri="{FF2B5EF4-FFF2-40B4-BE49-F238E27FC236}">
+                <a16:creationId xmlns:a16="http://schemas.microsoft.com/office/drawing/2014/main" id="{657577E8-16AE-F91A-6EBA-D9A3FC2D2AD2}"/>
+              </a:ext>
+            </a:extLst>
+          </p:cNvPr>
+          <p:cNvSpPr/>
+          <p:nvPr/>
+        </p:nvSpPr>
+        <p:spPr>
+          <a:xfrm>
+            <a:off x="792328" y="515112"/>
+            <a:ext cx="9784080" cy="320040"/>
+          </a:xfrm>
+          <a:prstGeom prst="rect">
+            <a:avLst/>
+          </a:prstGeom>
+          <a:noFill/>
+          <a:ln/>
+        </p:spPr>
+        <p:txBody>
+          <a:bodyPr wrap="square" rtlCol="0" anchor="ctr"/>
+          <a:lstStyle/>
+          <a:p>
+            <a:r>
+              <a:rPr lang="en-US" altLang="zh-TW" sz="1200" b="1" kern="0" spc="100" dirty="0">
+                <a:solidFill>
+                  <a:srgbClr val="CC6600"/>
+                </a:solidFill>
+                <a:latin typeface="微軟正黑體" panose="020B0604030504040204" pitchFamily="34" charset="-120"/>
+                <a:ea typeface="微軟正黑體" panose="020B0604030504040204" pitchFamily="34" charset="-120"/>
+                <a:cs typeface="Calibri" pitchFamily="34" charset="-120"/>
+              </a:rPr>
+              <a:t>ERROR</a:t>
+            </a:r>
+            <a:r>
+              <a:rPr lang="zh-TW" altLang="en-US" sz="1200" b="1" kern="0" spc="100" dirty="0">
+                <a:solidFill>
+                  <a:srgbClr val="CC6600"/>
+                </a:solidFill>
+                <a:latin typeface="微軟正黑體" panose="020B0604030504040204" pitchFamily="34" charset="-120"/>
+                <a:ea typeface="微軟正黑體" panose="020B0604030504040204" pitchFamily="34" charset="-120"/>
+                <a:cs typeface="Calibri" pitchFamily="34" charset="-120"/>
+              </a:rPr>
+              <a:t> </a:t>
+            </a:r>
+            <a:r>
+              <a:rPr lang="en-US" altLang="zh-TW" sz="1200" b="1" kern="0" spc="100" dirty="0">
+                <a:solidFill>
+                  <a:srgbClr val="CC6600"/>
+                </a:solidFill>
+                <a:latin typeface="微軟正黑體" panose="020B0604030504040204" pitchFamily="34" charset="-120"/>
+                <a:ea typeface="微軟正黑體" panose="020B0604030504040204" pitchFamily="34" charset="-120"/>
+                <a:cs typeface="Calibri" pitchFamily="34" charset="-120"/>
+              </a:rPr>
+              <a:t>MESSAGE</a:t>
+            </a:r>
+          </a:p>
+        </p:txBody>
+      </p:sp>
+      <p:sp>
+        <p:nvSpPr>
+          <p:cNvPr id="10" name="Text 2">
+            <a:extLst>
+              <a:ext uri="{FF2B5EF4-FFF2-40B4-BE49-F238E27FC236}">
+                <a16:creationId xmlns:a16="http://schemas.microsoft.com/office/drawing/2014/main" id="{A34086AA-7348-42E3-784B-8A6B09D1B791}"/>
+              </a:ext>
+            </a:extLst>
+          </p:cNvPr>
+          <p:cNvSpPr/>
+          <p:nvPr/>
+        </p:nvSpPr>
+        <p:spPr>
+          <a:xfrm>
+            <a:off x="792328" y="823976"/>
+            <a:ext cx="10241280" cy="548640"/>
+          </a:xfrm>
+          <a:prstGeom prst="rect">
+            <a:avLst/>
+          </a:prstGeom>
+          <a:noFill/>
+          <a:ln/>
+        </p:spPr>
+        <p:txBody>
+          <a:bodyPr wrap="square" rtlCol="0" anchor="ctr"/>
+          <a:lstStyle/>
+          <a:p>
+            <a:r>
+              <a:rPr lang="zh-TW" altLang="en-US" sz="2800" b="1" dirty="0">
+                <a:solidFill>
+                  <a:srgbClr val="1E293B"/>
+                </a:solidFill>
+                <a:latin typeface="微軟正黑體" panose="020B0604030504040204" pitchFamily="34" charset="-120"/>
+                <a:ea typeface="微軟正黑體" panose="020B0604030504040204" pitchFamily="34" charset="-120"/>
+                <a:cs typeface="Cambria" pitchFamily="34" charset="-120"/>
+              </a:rPr>
+              <a:t>常見防呆訊息對照表</a:t>
+            </a:r>
+          </a:p>
+        </p:txBody>
+      </p:sp>
     </p:spTree>
     <p:extLst>
       <p:ext uri="{BB962C8B-B14F-4D97-AF65-F5344CB8AC3E}">
@@ -7123,10 +6986,10 @@
       </p:grpSpPr>
       <p:sp>
         <p:nvSpPr>
-          <p:cNvPr id="2" name="投影片編號版面配置區 1">
-            <a:extLst>
-              <a:ext uri="{FF2B5EF4-FFF2-40B4-BE49-F238E27FC236}">
-                <a16:creationId xmlns:a16="http://schemas.microsoft.com/office/drawing/2014/main" id="{A8A8BF50-D956-E47F-D805-EAE848D1E5B9}"/>
+          <p:cNvPr id="3" name="投影片編號版面配置區 1">
+            <a:extLst>
+              <a:ext uri="{FF2B5EF4-FFF2-40B4-BE49-F238E27FC236}">
+                <a16:creationId xmlns:a16="http://schemas.microsoft.com/office/drawing/2014/main" id="{E70DFDE1-7CA7-E257-9DE2-BA94E8734AC0}"/>
               </a:ext>
             </a:extLst>
           </p:cNvPr>
@@ -7137,7 +7000,12 @@
             <p:ph type="sldNum" sz="quarter" idx="12"/>
           </p:nvPr>
         </p:nvSpPr>
-        <p:spPr/>
+        <p:spPr>
+          <a:xfrm>
+            <a:off x="8610600" y="6356350"/>
+            <a:ext cx="2743200" cy="365125"/>
+          </a:xfrm>
+        </p:spPr>
         <p:txBody>
           <a:bodyPr/>
           <a:lstStyle/>
@@ -7158,10 +7026,10 @@
       </p:sp>
       <p:sp>
         <p:nvSpPr>
-          <p:cNvPr id="5" name="Shape 4">
-            <a:extLst>
-              <a:ext uri="{FF2B5EF4-FFF2-40B4-BE49-F238E27FC236}">
-                <a16:creationId xmlns:a16="http://schemas.microsoft.com/office/drawing/2014/main" id="{635F322F-5889-5EE3-4E7F-34C1BC2538C2}"/>
+          <p:cNvPr id="4" name="Shape 4">
+            <a:extLst>
+              <a:ext uri="{FF2B5EF4-FFF2-40B4-BE49-F238E27FC236}">
+                <a16:creationId xmlns:a16="http://schemas.microsoft.com/office/drawing/2014/main" id="{FB2B3A92-6F80-7B8A-4F8F-F533D87E7C9B}"/>
               </a:ext>
             </a:extLst>
           </p:cNvPr>
@@ -7193,10 +7061,10 @@
       </p:sp>
       <p:sp>
         <p:nvSpPr>
-          <p:cNvPr id="6" name="Shape 5">
-            <a:extLst>
-              <a:ext uri="{FF2B5EF4-FFF2-40B4-BE49-F238E27FC236}">
-                <a16:creationId xmlns:a16="http://schemas.microsoft.com/office/drawing/2014/main" id="{F40230F8-4375-32AB-99B3-F8CB0CD48BAE}"/>
+          <p:cNvPr id="43" name="Shape 5">
+            <a:extLst>
+              <a:ext uri="{FF2B5EF4-FFF2-40B4-BE49-F238E27FC236}">
+                <a16:creationId xmlns:a16="http://schemas.microsoft.com/office/drawing/2014/main" id="{181F1B33-9F9B-C3CE-7CFD-53E44B3B7D55}"/>
               </a:ext>
             </a:extLst>
           </p:cNvPr>
@@ -7212,17 +7080,17 @@
             <a:avLst/>
           </a:prstGeom>
           <a:solidFill>
-            <a:srgbClr val="065A82"/>
+            <a:schemeClr val="bg1"/>
           </a:solidFill>
           <a:ln/>
         </p:spPr>
       </p:sp>
       <p:sp>
         <p:nvSpPr>
-          <p:cNvPr id="7" name="Text 6">
-            <a:extLst>
-              <a:ext uri="{FF2B5EF4-FFF2-40B4-BE49-F238E27FC236}">
-                <a16:creationId xmlns:a16="http://schemas.microsoft.com/office/drawing/2014/main" id="{41BB5971-4855-7823-CF9F-B3D1020FC947}"/>
+          <p:cNvPr id="44" name="Text 6">
+            <a:extLst>
+              <a:ext uri="{FF2B5EF4-FFF2-40B4-BE49-F238E27FC236}">
+                <a16:creationId xmlns:a16="http://schemas.microsoft.com/office/drawing/2014/main" id="{F0895629-9B83-2463-5427-6F296845DA0C}"/>
               </a:ext>
             </a:extLst>
           </p:cNvPr>
@@ -7267,10 +7135,10 @@
       </p:sp>
       <p:sp>
         <p:nvSpPr>
-          <p:cNvPr id="8" name="Text 7">
-            <a:extLst>
-              <a:ext uri="{FF2B5EF4-FFF2-40B4-BE49-F238E27FC236}">
-                <a16:creationId xmlns:a16="http://schemas.microsoft.com/office/drawing/2014/main" id="{A9ADC037-4A6A-3FE6-0AF9-09BA03D14A32}"/>
+          <p:cNvPr id="45" name="Text 7">
+            <a:extLst>
+              <a:ext uri="{FF2B5EF4-FFF2-40B4-BE49-F238E27FC236}">
+                <a16:creationId xmlns:a16="http://schemas.microsoft.com/office/drawing/2014/main" id="{41DF54D5-FA58-3887-A47F-76076785A916}"/>
               </a:ext>
             </a:extLst>
           </p:cNvPr>
@@ -7315,10 +7183,10 @@
       </p:sp>
       <p:sp>
         <p:nvSpPr>
-          <p:cNvPr id="9" name="Text 8">
-            <a:extLst>
-              <a:ext uri="{FF2B5EF4-FFF2-40B4-BE49-F238E27FC236}">
-                <a16:creationId xmlns:a16="http://schemas.microsoft.com/office/drawing/2014/main" id="{9A2EB634-0C49-9B98-6216-58FDC09910F8}"/>
+          <p:cNvPr id="46" name="Text 8">
+            <a:extLst>
+              <a:ext uri="{FF2B5EF4-FFF2-40B4-BE49-F238E27FC236}">
+                <a16:creationId xmlns:a16="http://schemas.microsoft.com/office/drawing/2014/main" id="{5338ACF6-B303-AE3C-0B6C-30340F9F2D6E}"/>
               </a:ext>
             </a:extLst>
           </p:cNvPr>
@@ -7450,10 +7318,10 @@
       </p:sp>
       <p:sp>
         <p:nvSpPr>
-          <p:cNvPr id="10" name="Shape 9">
-            <a:extLst>
-              <a:ext uri="{FF2B5EF4-FFF2-40B4-BE49-F238E27FC236}">
-                <a16:creationId xmlns:a16="http://schemas.microsoft.com/office/drawing/2014/main" id="{97A3F842-E5C9-008F-1E7F-73C8E355FB06}"/>
+          <p:cNvPr id="47" name="Shape 9">
+            <a:extLst>
+              <a:ext uri="{FF2B5EF4-FFF2-40B4-BE49-F238E27FC236}">
+                <a16:creationId xmlns:a16="http://schemas.microsoft.com/office/drawing/2014/main" id="{291F3E6F-67BB-1E51-D091-6FE269D716CE}"/>
               </a:ext>
             </a:extLst>
           </p:cNvPr>
@@ -7485,10 +7353,10 @@
       </p:sp>
       <p:sp>
         <p:nvSpPr>
-          <p:cNvPr id="11" name="Shape 10">
-            <a:extLst>
-              <a:ext uri="{FF2B5EF4-FFF2-40B4-BE49-F238E27FC236}">
-                <a16:creationId xmlns:a16="http://schemas.microsoft.com/office/drawing/2014/main" id="{138DE4A8-50EB-3967-B90F-51C099EEBA17}"/>
+          <p:cNvPr id="48" name="Shape 10">
+            <a:extLst>
+              <a:ext uri="{FF2B5EF4-FFF2-40B4-BE49-F238E27FC236}">
+                <a16:creationId xmlns:a16="http://schemas.microsoft.com/office/drawing/2014/main" id="{C1AEC4C9-F1C1-CD88-133C-7C7671BFCF1B}"/>
               </a:ext>
             </a:extLst>
           </p:cNvPr>
@@ -7504,17 +7372,17 @@
             <a:avLst/>
           </a:prstGeom>
           <a:solidFill>
-            <a:srgbClr val="065A82"/>
+            <a:schemeClr val="bg1"/>
           </a:solidFill>
           <a:ln/>
         </p:spPr>
       </p:sp>
       <p:sp>
         <p:nvSpPr>
-          <p:cNvPr id="12" name="Text 11">
-            <a:extLst>
-              <a:ext uri="{FF2B5EF4-FFF2-40B4-BE49-F238E27FC236}">
-                <a16:creationId xmlns:a16="http://schemas.microsoft.com/office/drawing/2014/main" id="{E8ADA4C9-002F-D384-36AA-714EA497C732}"/>
+          <p:cNvPr id="49" name="Text 11">
+            <a:extLst>
+              <a:ext uri="{FF2B5EF4-FFF2-40B4-BE49-F238E27FC236}">
+                <a16:creationId xmlns:a16="http://schemas.microsoft.com/office/drawing/2014/main" id="{AA6E5113-F14A-DE71-9800-C4358F91A5D0}"/>
               </a:ext>
             </a:extLst>
           </p:cNvPr>
@@ -7559,10 +7427,10 @@
       </p:sp>
       <p:sp>
         <p:nvSpPr>
-          <p:cNvPr id="13" name="Text 12">
-            <a:extLst>
-              <a:ext uri="{FF2B5EF4-FFF2-40B4-BE49-F238E27FC236}">
-                <a16:creationId xmlns:a16="http://schemas.microsoft.com/office/drawing/2014/main" id="{55BDBD2E-AFE0-AD73-848B-25B3959F87A5}"/>
+          <p:cNvPr id="50" name="Text 12">
+            <a:extLst>
+              <a:ext uri="{FF2B5EF4-FFF2-40B4-BE49-F238E27FC236}">
+                <a16:creationId xmlns:a16="http://schemas.microsoft.com/office/drawing/2014/main" id="{0ABF45E0-4CE2-FD47-2D5F-BDDAA68CCFDD}"/>
               </a:ext>
             </a:extLst>
           </p:cNvPr>
@@ -7607,10 +7475,10 @@
       </p:sp>
       <p:sp>
         <p:nvSpPr>
-          <p:cNvPr id="14" name="Text 13">
-            <a:extLst>
-              <a:ext uri="{FF2B5EF4-FFF2-40B4-BE49-F238E27FC236}">
-                <a16:creationId xmlns:a16="http://schemas.microsoft.com/office/drawing/2014/main" id="{EB464430-3D62-52D7-622B-24BF6EC67A8D}"/>
+          <p:cNvPr id="51" name="Text 13">
+            <a:extLst>
+              <a:ext uri="{FF2B5EF4-FFF2-40B4-BE49-F238E27FC236}">
+                <a16:creationId xmlns:a16="http://schemas.microsoft.com/office/drawing/2014/main" id="{8A5B19E3-5472-9C52-CD46-709350F21E40}"/>
               </a:ext>
             </a:extLst>
           </p:cNvPr>
@@ -7659,10 +7527,10 @@
       </p:sp>
       <p:sp>
         <p:nvSpPr>
-          <p:cNvPr id="15" name="Shape 14">
-            <a:extLst>
-              <a:ext uri="{FF2B5EF4-FFF2-40B4-BE49-F238E27FC236}">
-                <a16:creationId xmlns:a16="http://schemas.microsoft.com/office/drawing/2014/main" id="{9B3B26AF-B3E9-DE27-F55A-F24072B59140}"/>
+          <p:cNvPr id="52" name="Shape 14">
+            <a:extLst>
+              <a:ext uri="{FF2B5EF4-FFF2-40B4-BE49-F238E27FC236}">
+                <a16:creationId xmlns:a16="http://schemas.microsoft.com/office/drawing/2014/main" id="{3E00CB71-9641-E165-58FE-3C10866C6FA1}"/>
               </a:ext>
             </a:extLst>
           </p:cNvPr>
@@ -7694,10 +7562,10 @@
       </p:sp>
       <p:sp>
         <p:nvSpPr>
-          <p:cNvPr id="16" name="Shape 15">
-            <a:extLst>
-              <a:ext uri="{FF2B5EF4-FFF2-40B4-BE49-F238E27FC236}">
-                <a16:creationId xmlns:a16="http://schemas.microsoft.com/office/drawing/2014/main" id="{F9985536-E107-151D-EA3C-C24E205D6D19}"/>
+          <p:cNvPr id="53" name="Shape 15">
+            <a:extLst>
+              <a:ext uri="{FF2B5EF4-FFF2-40B4-BE49-F238E27FC236}">
+                <a16:creationId xmlns:a16="http://schemas.microsoft.com/office/drawing/2014/main" id="{E3737A41-1C91-E70A-9226-6C645CA7AB4F}"/>
               </a:ext>
             </a:extLst>
           </p:cNvPr>
@@ -7713,17 +7581,17 @@
             <a:avLst/>
           </a:prstGeom>
           <a:solidFill>
-            <a:srgbClr val="065A82"/>
+            <a:schemeClr val="bg1"/>
           </a:solidFill>
           <a:ln/>
         </p:spPr>
       </p:sp>
       <p:sp>
         <p:nvSpPr>
-          <p:cNvPr id="17" name="Text 16">
-            <a:extLst>
-              <a:ext uri="{FF2B5EF4-FFF2-40B4-BE49-F238E27FC236}">
-                <a16:creationId xmlns:a16="http://schemas.microsoft.com/office/drawing/2014/main" id="{3A3B6825-F0A1-B260-8751-74477C2C6D01}"/>
+          <p:cNvPr id="54" name="Text 16">
+            <a:extLst>
+              <a:ext uri="{FF2B5EF4-FFF2-40B4-BE49-F238E27FC236}">
+                <a16:creationId xmlns:a16="http://schemas.microsoft.com/office/drawing/2014/main" id="{5B472E21-C098-8675-559B-26AEE30EDF48}"/>
               </a:ext>
             </a:extLst>
           </p:cNvPr>
@@ -7768,10 +7636,10 @@
       </p:sp>
       <p:sp>
         <p:nvSpPr>
-          <p:cNvPr id="18" name="Text 17">
-            <a:extLst>
-              <a:ext uri="{FF2B5EF4-FFF2-40B4-BE49-F238E27FC236}">
-                <a16:creationId xmlns:a16="http://schemas.microsoft.com/office/drawing/2014/main" id="{F0072D79-817A-1FFD-3B70-14C770D643E9}"/>
+          <p:cNvPr id="55" name="Text 17">
+            <a:extLst>
+              <a:ext uri="{FF2B5EF4-FFF2-40B4-BE49-F238E27FC236}">
+                <a16:creationId xmlns:a16="http://schemas.microsoft.com/office/drawing/2014/main" id="{E8842878-6E68-F4BC-6386-B818FA8AC7C9}"/>
               </a:ext>
             </a:extLst>
           </p:cNvPr>
@@ -7816,10 +7684,10 @@
       </p:sp>
       <p:sp>
         <p:nvSpPr>
-          <p:cNvPr id="19" name="Text 18">
-            <a:extLst>
-              <a:ext uri="{FF2B5EF4-FFF2-40B4-BE49-F238E27FC236}">
-                <a16:creationId xmlns:a16="http://schemas.microsoft.com/office/drawing/2014/main" id="{66361380-DE07-C85A-A3AB-E71A46DA6007}"/>
+          <p:cNvPr id="56" name="Text 18">
+            <a:extLst>
+              <a:ext uri="{FF2B5EF4-FFF2-40B4-BE49-F238E27FC236}">
+                <a16:creationId xmlns:a16="http://schemas.microsoft.com/office/drawing/2014/main" id="{B87A6784-698B-5D7D-A0EF-48B114F6C5AB}"/>
               </a:ext>
             </a:extLst>
           </p:cNvPr>
@@ -7868,10 +7736,10 @@
       </p:sp>
       <p:sp>
         <p:nvSpPr>
-          <p:cNvPr id="20" name="Shape 19">
-            <a:extLst>
-              <a:ext uri="{FF2B5EF4-FFF2-40B4-BE49-F238E27FC236}">
-                <a16:creationId xmlns:a16="http://schemas.microsoft.com/office/drawing/2014/main" id="{516C6815-2544-BEE8-56D2-0493EF29D740}"/>
+          <p:cNvPr id="57" name="Shape 19">
+            <a:extLst>
+              <a:ext uri="{FF2B5EF4-FFF2-40B4-BE49-F238E27FC236}">
+                <a16:creationId xmlns:a16="http://schemas.microsoft.com/office/drawing/2014/main" id="{49560710-0CFE-AEA7-C9C1-BCF280AB314F}"/>
               </a:ext>
             </a:extLst>
           </p:cNvPr>
@@ -7903,10 +7771,10 @@
       </p:sp>
       <p:sp>
         <p:nvSpPr>
-          <p:cNvPr id="21" name="Shape 20">
-            <a:extLst>
-              <a:ext uri="{FF2B5EF4-FFF2-40B4-BE49-F238E27FC236}">
-                <a16:creationId xmlns:a16="http://schemas.microsoft.com/office/drawing/2014/main" id="{D21BED4F-BC08-70BE-13CA-CCDC33334301}"/>
+          <p:cNvPr id="58" name="Shape 20">
+            <a:extLst>
+              <a:ext uri="{FF2B5EF4-FFF2-40B4-BE49-F238E27FC236}">
+                <a16:creationId xmlns:a16="http://schemas.microsoft.com/office/drawing/2014/main" id="{B896B2F5-1CC0-3F77-2760-BC9D92440B12}"/>
               </a:ext>
             </a:extLst>
           </p:cNvPr>
@@ -7922,17 +7790,17 @@
             <a:avLst/>
           </a:prstGeom>
           <a:solidFill>
-            <a:srgbClr val="065A82"/>
+            <a:schemeClr val="bg1"/>
           </a:solidFill>
           <a:ln/>
         </p:spPr>
       </p:sp>
       <p:sp>
         <p:nvSpPr>
-          <p:cNvPr id="22" name="Text 21">
-            <a:extLst>
-              <a:ext uri="{FF2B5EF4-FFF2-40B4-BE49-F238E27FC236}">
-                <a16:creationId xmlns:a16="http://schemas.microsoft.com/office/drawing/2014/main" id="{D15BA11D-E0D3-EBC9-666D-37F4C3CD2E98}"/>
+          <p:cNvPr id="59" name="Text 21">
+            <a:extLst>
+              <a:ext uri="{FF2B5EF4-FFF2-40B4-BE49-F238E27FC236}">
+                <a16:creationId xmlns:a16="http://schemas.microsoft.com/office/drawing/2014/main" id="{F5F80241-0072-FD6F-5908-40B5D13BE1E1}"/>
               </a:ext>
             </a:extLst>
           </p:cNvPr>
@@ -7977,10 +7845,10 @@
       </p:sp>
       <p:sp>
         <p:nvSpPr>
-          <p:cNvPr id="23" name="Text 22">
-            <a:extLst>
-              <a:ext uri="{FF2B5EF4-FFF2-40B4-BE49-F238E27FC236}">
-                <a16:creationId xmlns:a16="http://schemas.microsoft.com/office/drawing/2014/main" id="{7019D174-BD90-1914-2AD8-557DA9C5F0E9}"/>
+          <p:cNvPr id="60" name="Text 22">
+            <a:extLst>
+              <a:ext uri="{FF2B5EF4-FFF2-40B4-BE49-F238E27FC236}">
+                <a16:creationId xmlns:a16="http://schemas.microsoft.com/office/drawing/2014/main" id="{13853744-2A78-CDFF-3D12-71086D99EB1F}"/>
               </a:ext>
             </a:extLst>
           </p:cNvPr>
@@ -8025,10 +7893,10 @@
       </p:sp>
       <p:sp>
         <p:nvSpPr>
-          <p:cNvPr id="24" name="Text 23">
-            <a:extLst>
-              <a:ext uri="{FF2B5EF4-FFF2-40B4-BE49-F238E27FC236}">
-                <a16:creationId xmlns:a16="http://schemas.microsoft.com/office/drawing/2014/main" id="{73E144A5-1F2E-F20D-AEB5-C068FB0029F4}"/>
+          <p:cNvPr id="61" name="Text 23">
+            <a:extLst>
+              <a:ext uri="{FF2B5EF4-FFF2-40B4-BE49-F238E27FC236}">
+                <a16:creationId xmlns:a16="http://schemas.microsoft.com/office/drawing/2014/main" id="{42350087-760E-5016-105D-50639B156446}"/>
               </a:ext>
             </a:extLst>
           </p:cNvPr>
@@ -8077,10 +7945,10 @@
       </p:sp>
       <p:sp>
         <p:nvSpPr>
-          <p:cNvPr id="25" name="Shape 24">
-            <a:extLst>
-              <a:ext uri="{FF2B5EF4-FFF2-40B4-BE49-F238E27FC236}">
-                <a16:creationId xmlns:a16="http://schemas.microsoft.com/office/drawing/2014/main" id="{6E9E8B06-B0D8-B1D9-97CF-0A6EC3EE07B5}"/>
+          <p:cNvPr id="62" name="Shape 24">
+            <a:extLst>
+              <a:ext uri="{FF2B5EF4-FFF2-40B4-BE49-F238E27FC236}">
+                <a16:creationId xmlns:a16="http://schemas.microsoft.com/office/drawing/2014/main" id="{0DF20AB3-40E7-A101-266F-E30C2A1C0535}"/>
               </a:ext>
             </a:extLst>
           </p:cNvPr>
@@ -8112,10 +7980,10 @@
       </p:sp>
       <p:sp>
         <p:nvSpPr>
-          <p:cNvPr id="26" name="Shape 25">
-            <a:extLst>
-              <a:ext uri="{FF2B5EF4-FFF2-40B4-BE49-F238E27FC236}">
-                <a16:creationId xmlns:a16="http://schemas.microsoft.com/office/drawing/2014/main" id="{F5F00DF0-5B27-5D23-3ABB-EA0422FCB8C6}"/>
+          <p:cNvPr id="63" name="Shape 25">
+            <a:extLst>
+              <a:ext uri="{FF2B5EF4-FFF2-40B4-BE49-F238E27FC236}">
+                <a16:creationId xmlns:a16="http://schemas.microsoft.com/office/drawing/2014/main" id="{6DE40D7A-E7DA-E942-7380-C01AF1422A16}"/>
               </a:ext>
             </a:extLst>
           </p:cNvPr>
@@ -8131,17 +7999,17 @@
             <a:avLst/>
           </a:prstGeom>
           <a:solidFill>
-            <a:srgbClr val="065A82"/>
+            <a:schemeClr val="bg1"/>
           </a:solidFill>
           <a:ln/>
         </p:spPr>
       </p:sp>
       <p:sp>
         <p:nvSpPr>
-          <p:cNvPr id="27" name="Text 26">
-            <a:extLst>
-              <a:ext uri="{FF2B5EF4-FFF2-40B4-BE49-F238E27FC236}">
-                <a16:creationId xmlns:a16="http://schemas.microsoft.com/office/drawing/2014/main" id="{855BFAD8-9F4B-E799-FE1D-505F4CDB2511}"/>
+          <p:cNvPr id="64" name="Text 26">
+            <a:extLst>
+              <a:ext uri="{FF2B5EF4-FFF2-40B4-BE49-F238E27FC236}">
+                <a16:creationId xmlns:a16="http://schemas.microsoft.com/office/drawing/2014/main" id="{A6F8C145-B6D6-3AE8-D762-ECD9B1D2A2CE}"/>
               </a:ext>
             </a:extLst>
           </p:cNvPr>
@@ -8186,10 +8054,10 @@
       </p:sp>
       <p:sp>
         <p:nvSpPr>
-          <p:cNvPr id="28" name="Text 27">
-            <a:extLst>
-              <a:ext uri="{FF2B5EF4-FFF2-40B4-BE49-F238E27FC236}">
-                <a16:creationId xmlns:a16="http://schemas.microsoft.com/office/drawing/2014/main" id="{56190691-D9BF-DE92-D27B-E3862F72468B}"/>
+          <p:cNvPr id="65" name="Text 27">
+            <a:extLst>
+              <a:ext uri="{FF2B5EF4-FFF2-40B4-BE49-F238E27FC236}">
+                <a16:creationId xmlns:a16="http://schemas.microsoft.com/office/drawing/2014/main" id="{51B64D13-B1F7-E86F-7B9B-0837C4479A3A}"/>
               </a:ext>
             </a:extLst>
           </p:cNvPr>
@@ -8234,10 +8102,10 @@
       </p:sp>
       <p:sp>
         <p:nvSpPr>
-          <p:cNvPr id="29" name="Text 28">
-            <a:extLst>
-              <a:ext uri="{FF2B5EF4-FFF2-40B4-BE49-F238E27FC236}">
-                <a16:creationId xmlns:a16="http://schemas.microsoft.com/office/drawing/2014/main" id="{394C494F-90EE-A403-073F-C9A007E9B084}"/>
+          <p:cNvPr id="66" name="Text 28">
+            <a:extLst>
+              <a:ext uri="{FF2B5EF4-FFF2-40B4-BE49-F238E27FC236}">
+                <a16:creationId xmlns:a16="http://schemas.microsoft.com/office/drawing/2014/main" id="{4B78E0BC-C06D-D29A-3468-F91F98BB6F36}"/>
               </a:ext>
             </a:extLst>
           </p:cNvPr>
@@ -8310,10 +8178,10 @@
       </p:sp>
       <p:sp>
         <p:nvSpPr>
-          <p:cNvPr id="30" name="Shape 29">
-            <a:extLst>
-              <a:ext uri="{FF2B5EF4-FFF2-40B4-BE49-F238E27FC236}">
-                <a16:creationId xmlns:a16="http://schemas.microsoft.com/office/drawing/2014/main" id="{A3C6E9DC-248C-F4AA-8AB1-FB0DAE08B4E5}"/>
+          <p:cNvPr id="67" name="Shape 29">
+            <a:extLst>
+              <a:ext uri="{FF2B5EF4-FFF2-40B4-BE49-F238E27FC236}">
+                <a16:creationId xmlns:a16="http://schemas.microsoft.com/office/drawing/2014/main" id="{8E8DF228-3219-028B-FC19-53EA811B810A}"/>
               </a:ext>
             </a:extLst>
           </p:cNvPr>
@@ -8345,10 +8213,10 @@
       </p:sp>
       <p:sp>
         <p:nvSpPr>
-          <p:cNvPr id="31" name="Shape 30">
-            <a:extLst>
-              <a:ext uri="{FF2B5EF4-FFF2-40B4-BE49-F238E27FC236}">
-                <a16:creationId xmlns:a16="http://schemas.microsoft.com/office/drawing/2014/main" id="{C9C806FC-C7D7-E574-3C3B-6D1A49B92CE6}"/>
+          <p:cNvPr id="68" name="Shape 30">
+            <a:extLst>
+              <a:ext uri="{FF2B5EF4-FFF2-40B4-BE49-F238E27FC236}">
+                <a16:creationId xmlns:a16="http://schemas.microsoft.com/office/drawing/2014/main" id="{90E0D42D-E613-3869-DACC-79BF31DA66B7}"/>
               </a:ext>
             </a:extLst>
           </p:cNvPr>
@@ -8364,17 +8232,17 @@
             <a:avLst/>
           </a:prstGeom>
           <a:solidFill>
-            <a:srgbClr val="065A82"/>
+            <a:schemeClr val="bg1"/>
           </a:solidFill>
           <a:ln/>
         </p:spPr>
       </p:sp>
       <p:sp>
         <p:nvSpPr>
-          <p:cNvPr id="32" name="Text 31">
-            <a:extLst>
-              <a:ext uri="{FF2B5EF4-FFF2-40B4-BE49-F238E27FC236}">
-                <a16:creationId xmlns:a16="http://schemas.microsoft.com/office/drawing/2014/main" id="{5555E928-6AED-A936-2060-567333444F82}"/>
+          <p:cNvPr id="69" name="Text 31">
+            <a:extLst>
+              <a:ext uri="{FF2B5EF4-FFF2-40B4-BE49-F238E27FC236}">
+                <a16:creationId xmlns:a16="http://schemas.microsoft.com/office/drawing/2014/main" id="{9B20C842-C2D8-D4E3-21F4-351D02DACBE0}"/>
               </a:ext>
             </a:extLst>
           </p:cNvPr>
@@ -8419,10 +8287,10 @@
       </p:sp>
       <p:sp>
         <p:nvSpPr>
-          <p:cNvPr id="33" name="Text 32">
-            <a:extLst>
-              <a:ext uri="{FF2B5EF4-FFF2-40B4-BE49-F238E27FC236}">
-                <a16:creationId xmlns:a16="http://schemas.microsoft.com/office/drawing/2014/main" id="{65328563-44AA-CD6D-4C79-EA66A523A355}"/>
+          <p:cNvPr id="70" name="Text 32">
+            <a:extLst>
+              <a:ext uri="{FF2B5EF4-FFF2-40B4-BE49-F238E27FC236}">
+                <a16:creationId xmlns:a16="http://schemas.microsoft.com/office/drawing/2014/main" id="{DD6A213E-3E48-50DF-04D6-4186C2B44660}"/>
               </a:ext>
             </a:extLst>
           </p:cNvPr>
@@ -8467,10 +8335,10 @@
       </p:sp>
       <p:sp>
         <p:nvSpPr>
-          <p:cNvPr id="34" name="Text 33">
-            <a:extLst>
-              <a:ext uri="{FF2B5EF4-FFF2-40B4-BE49-F238E27FC236}">
-                <a16:creationId xmlns:a16="http://schemas.microsoft.com/office/drawing/2014/main" id="{0732BAE0-187D-556B-8E0E-C4B67354F88B}"/>
+          <p:cNvPr id="71" name="Text 33">
+            <a:extLst>
+              <a:ext uri="{FF2B5EF4-FFF2-40B4-BE49-F238E27FC236}">
+                <a16:creationId xmlns:a16="http://schemas.microsoft.com/office/drawing/2014/main" id="{62CFE8FC-A58B-2163-DAED-F962AA9D5CFC}"/>
               </a:ext>
             </a:extLst>
           </p:cNvPr>
@@ -8517,100 +8385,12 @@
           </a:p>
         </p:txBody>
       </p:sp>
-      <p:sp>
-        <p:nvSpPr>
-          <p:cNvPr id="35" name="Text 1">
-            <a:extLst>
-              <a:ext uri="{FF2B5EF4-FFF2-40B4-BE49-F238E27FC236}">
-                <a16:creationId xmlns:a16="http://schemas.microsoft.com/office/drawing/2014/main" id="{7A9717D5-715C-E157-36BA-200D034AEA52}"/>
-              </a:ext>
-            </a:extLst>
-          </p:cNvPr>
-          <p:cNvSpPr/>
-          <p:nvPr/>
-        </p:nvSpPr>
-        <p:spPr>
-          <a:xfrm>
-            <a:off x="1432408" y="438912"/>
-            <a:ext cx="9144000" cy="320040"/>
-          </a:xfrm>
-          <a:prstGeom prst="rect">
-            <a:avLst/>
-          </a:prstGeom>
-          <a:noFill/>
-          <a:ln/>
-        </p:spPr>
-        <p:txBody>
-          <a:bodyPr wrap="square" rtlCol="0" anchor="ctr"/>
-          <a:lstStyle/>
-          <a:p>
-            <a:pPr marL="0" indent="0">
-              <a:buNone/>
-            </a:pPr>
-            <a:r>
-              <a:rPr lang="en-US" sz="1300" b="1" kern="0" spc="100" dirty="0">
-                <a:solidFill>
-                  <a:srgbClr val="1C7293"/>
-                </a:solidFill>
-                <a:latin typeface="微軟正黑體" panose="020B0604030504040204" pitchFamily="34" charset="-120"/>
-                <a:ea typeface="微軟正黑體" panose="020B0604030504040204" pitchFamily="34" charset="-120"/>
-                <a:cs typeface="Calibri" pitchFamily="34" charset="-120"/>
-              </a:rPr>
-              <a:t>SYSTEM OVERVIEW</a:t>
-            </a:r>
-          </a:p>
-        </p:txBody>
-      </p:sp>
-      <p:sp>
-        <p:nvSpPr>
-          <p:cNvPr id="36" name="Text 2">
-            <a:extLst>
-              <a:ext uri="{FF2B5EF4-FFF2-40B4-BE49-F238E27FC236}">
-                <a16:creationId xmlns:a16="http://schemas.microsoft.com/office/drawing/2014/main" id="{D03A6ACC-6BF5-FBA2-850B-CDD27730584C}"/>
-              </a:ext>
-            </a:extLst>
-          </p:cNvPr>
-          <p:cNvSpPr/>
-          <p:nvPr/>
-        </p:nvSpPr>
-        <p:spPr>
-          <a:xfrm>
-            <a:off x="1432408" y="722376"/>
-            <a:ext cx="9601200" cy="548640"/>
-          </a:xfrm>
-          <a:prstGeom prst="rect">
-            <a:avLst/>
-          </a:prstGeom>
-          <a:noFill/>
-          <a:ln/>
-        </p:spPr>
-        <p:txBody>
-          <a:bodyPr wrap="square" rtlCol="0" anchor="ctr"/>
-          <a:lstStyle/>
-          <a:p>
-            <a:pPr marL="0" indent="0">
-              <a:buNone/>
-            </a:pPr>
-            <a:r>
-              <a:rPr lang="zh-TW" altLang="en-US" sz="2800" b="1" dirty="0">
-                <a:solidFill>
-                  <a:srgbClr val="1E293B"/>
-                </a:solidFill>
-                <a:latin typeface="微軟正黑體" panose="020B0604030504040204" pitchFamily="34" charset="-120"/>
-                <a:ea typeface="微軟正黑體" panose="020B0604030504040204" pitchFamily="34" charset="-120"/>
-                <a:cs typeface="Cambria" pitchFamily="34" charset="-120"/>
-              </a:rPr>
-              <a:t>應用程式架構總覽</a:t>
-            </a:r>
-          </a:p>
-        </p:txBody>
-      </p:sp>
       <p:pic>
         <p:nvPicPr>
-          <p:cNvPr id="37" name="Image 0" descr="preencoded.png">
-            <a:extLst>
-              <a:ext uri="{FF2B5EF4-FFF2-40B4-BE49-F238E27FC236}">
-                <a16:creationId xmlns:a16="http://schemas.microsoft.com/office/drawing/2014/main" id="{B9D53509-6A9C-9831-0390-2B3340CC7A47}"/>
+          <p:cNvPr id="72" name="Image 0" descr="preencoded.png">
+            <a:extLst>
+              <a:ext uri="{FF2B5EF4-FFF2-40B4-BE49-F238E27FC236}">
+                <a16:creationId xmlns:a16="http://schemas.microsoft.com/office/drawing/2014/main" id="{B374AF33-6482-7CB0-DD2D-210146AA17D2}"/>
               </a:ext>
             </a:extLst>
           </p:cNvPr>
@@ -8637,10 +8417,10 @@
       </p:pic>
       <p:pic>
         <p:nvPicPr>
-          <p:cNvPr id="38" name="Image 1" descr="preencoded.png">
-            <a:extLst>
-              <a:ext uri="{FF2B5EF4-FFF2-40B4-BE49-F238E27FC236}">
-                <a16:creationId xmlns:a16="http://schemas.microsoft.com/office/drawing/2014/main" id="{3C22ECA6-1B64-0F49-0B05-60EC69DB39C5}"/>
+          <p:cNvPr id="73" name="Image 1" descr="preencoded.png">
+            <a:extLst>
+              <a:ext uri="{FF2B5EF4-FFF2-40B4-BE49-F238E27FC236}">
+                <a16:creationId xmlns:a16="http://schemas.microsoft.com/office/drawing/2014/main" id="{04C0429F-048C-644E-719D-5455A847FF45}"/>
               </a:ext>
             </a:extLst>
           </p:cNvPr>
@@ -8667,10 +8447,10 @@
       </p:pic>
       <p:pic>
         <p:nvPicPr>
-          <p:cNvPr id="39" name="Image 2" descr="preencoded.png">
-            <a:extLst>
-              <a:ext uri="{FF2B5EF4-FFF2-40B4-BE49-F238E27FC236}">
-                <a16:creationId xmlns:a16="http://schemas.microsoft.com/office/drawing/2014/main" id="{A9254F6F-17F3-9C74-094A-B0182009EF20}"/>
+          <p:cNvPr id="74" name="Image 2" descr="preencoded.png">
+            <a:extLst>
+              <a:ext uri="{FF2B5EF4-FFF2-40B4-BE49-F238E27FC236}">
+                <a16:creationId xmlns:a16="http://schemas.microsoft.com/office/drawing/2014/main" id="{4AE5F2DC-7F4C-6123-AFE4-8C130277DF9A}"/>
               </a:ext>
             </a:extLst>
           </p:cNvPr>
@@ -8697,10 +8477,10 @@
       </p:pic>
       <p:pic>
         <p:nvPicPr>
-          <p:cNvPr id="40" name="Image 3" descr="preencoded.png">
-            <a:extLst>
-              <a:ext uri="{FF2B5EF4-FFF2-40B4-BE49-F238E27FC236}">
-                <a16:creationId xmlns:a16="http://schemas.microsoft.com/office/drawing/2014/main" id="{3B62B609-3397-4952-EEA8-FB52F0C105E7}"/>
+          <p:cNvPr id="75" name="Image 3" descr="preencoded.png">
+            <a:extLst>
+              <a:ext uri="{FF2B5EF4-FFF2-40B4-BE49-F238E27FC236}">
+                <a16:creationId xmlns:a16="http://schemas.microsoft.com/office/drawing/2014/main" id="{4B28C365-1399-3D84-18EC-567059F9C1C0}"/>
               </a:ext>
             </a:extLst>
           </p:cNvPr>
@@ -8727,10 +8507,10 @@
       </p:pic>
       <p:pic>
         <p:nvPicPr>
-          <p:cNvPr id="41" name="Image 4" descr="preencoded.png">
-            <a:extLst>
-              <a:ext uri="{FF2B5EF4-FFF2-40B4-BE49-F238E27FC236}">
-                <a16:creationId xmlns:a16="http://schemas.microsoft.com/office/drawing/2014/main" id="{49664F26-F18C-328B-AB37-A4308755E734}"/>
+          <p:cNvPr id="76" name="Image 4" descr="preencoded.png">
+            <a:extLst>
+              <a:ext uri="{FF2B5EF4-FFF2-40B4-BE49-F238E27FC236}">
+                <a16:creationId xmlns:a16="http://schemas.microsoft.com/office/drawing/2014/main" id="{C9C15BB3-765E-38DD-37DE-9FD2DF0C45A3}"/>
               </a:ext>
             </a:extLst>
           </p:cNvPr>
@@ -8757,10 +8537,10 @@
       </p:pic>
       <p:pic>
         <p:nvPicPr>
-          <p:cNvPr id="42" name="Image 2" descr="preencoded.png">
-            <a:extLst>
-              <a:ext uri="{FF2B5EF4-FFF2-40B4-BE49-F238E27FC236}">
-                <a16:creationId xmlns:a16="http://schemas.microsoft.com/office/drawing/2014/main" id="{36ED3D49-37F2-4301-28B5-C4139C79764C}"/>
+          <p:cNvPr id="77" name="Image 2" descr="preencoded.png">
+            <a:extLst>
+              <a:ext uri="{FF2B5EF4-FFF2-40B4-BE49-F238E27FC236}">
+                <a16:creationId xmlns:a16="http://schemas.microsoft.com/office/drawing/2014/main" id="{E65AEA0D-B2DD-A329-A92F-76BEE7C1AEEF}"/>
               </a:ext>
             </a:extLst>
           </p:cNvPr>
@@ -8785,6 +8565,88 @@
           </a:prstGeom>
         </p:spPr>
       </p:pic>
+      <p:sp>
+        <p:nvSpPr>
+          <p:cNvPr id="78" name="Text 1">
+            <a:extLst>
+              <a:ext uri="{FF2B5EF4-FFF2-40B4-BE49-F238E27FC236}">
+                <a16:creationId xmlns:a16="http://schemas.microsoft.com/office/drawing/2014/main" id="{824CB9BC-3DC6-47AC-2E55-C942E06317FF}"/>
+              </a:ext>
+            </a:extLst>
+          </p:cNvPr>
+          <p:cNvSpPr/>
+          <p:nvPr/>
+        </p:nvSpPr>
+        <p:spPr>
+          <a:xfrm>
+            <a:off x="792328" y="515112"/>
+            <a:ext cx="9784080" cy="320040"/>
+          </a:xfrm>
+          <a:prstGeom prst="rect">
+            <a:avLst/>
+          </a:prstGeom>
+          <a:noFill/>
+          <a:ln/>
+        </p:spPr>
+        <p:txBody>
+          <a:bodyPr wrap="square" rtlCol="0" anchor="ctr"/>
+          <a:lstStyle/>
+          <a:p>
+            <a:r>
+              <a:rPr lang="en-US" altLang="zh-TW" sz="1200" b="1" kern="0" spc="100" dirty="0">
+                <a:solidFill>
+                  <a:srgbClr val="1C7293"/>
+                </a:solidFill>
+                <a:latin typeface="微軟正黑體" panose="020B0604030504040204" pitchFamily="34" charset="-120"/>
+                <a:ea typeface="微軟正黑體" panose="020B0604030504040204" pitchFamily="34" charset="-120"/>
+                <a:cs typeface="Calibri" pitchFamily="34" charset="-120"/>
+              </a:rPr>
+              <a:t>SYSTEM OVERVIEW</a:t>
+            </a:r>
+          </a:p>
+        </p:txBody>
+      </p:sp>
+      <p:sp>
+        <p:nvSpPr>
+          <p:cNvPr id="79" name="Text 2">
+            <a:extLst>
+              <a:ext uri="{FF2B5EF4-FFF2-40B4-BE49-F238E27FC236}">
+                <a16:creationId xmlns:a16="http://schemas.microsoft.com/office/drawing/2014/main" id="{16631830-B2CF-62F1-33BE-D1AADF881CC2}"/>
+              </a:ext>
+            </a:extLst>
+          </p:cNvPr>
+          <p:cNvSpPr/>
+          <p:nvPr/>
+        </p:nvSpPr>
+        <p:spPr>
+          <a:xfrm>
+            <a:off x="792328" y="823976"/>
+            <a:ext cx="10241280" cy="548640"/>
+          </a:xfrm>
+          <a:prstGeom prst="rect">
+            <a:avLst/>
+          </a:prstGeom>
+          <a:noFill/>
+          <a:ln/>
+        </p:spPr>
+        <p:txBody>
+          <a:bodyPr wrap="square" rtlCol="0" anchor="ctr"/>
+          <a:lstStyle/>
+          <a:p>
+            <a:r>
+              <a:rPr lang="zh-TW" altLang="en-US" sz="2800" b="1" dirty="0">
+                <a:solidFill>
+                  <a:srgbClr val="1E293B"/>
+                </a:solidFill>
+                <a:latin typeface="微軟正黑體" panose="020B0604030504040204" pitchFamily="34" charset="-120"/>
+                <a:ea typeface="微軟正黑體" panose="020B0604030504040204" pitchFamily="34" charset="-120"/>
+                <a:cs typeface="Cambria" pitchFamily="34" charset="-120"/>
+              </a:rPr>
+              <a:t>應用程式架構總覽</a:t>
+            </a:r>
+          </a:p>
+        </p:txBody>
+      </p:sp>
     </p:spTree>
     <p:extLst>
       <p:ext uri="{BB962C8B-B14F-4D97-AF65-F5344CB8AC3E}">
@@ -9079,94 +8941,6 @@
       </p:sp>
       <p:sp>
         <p:nvSpPr>
-          <p:cNvPr id="3" name="Text 1">
-            <a:extLst>
-              <a:ext uri="{FF2B5EF4-FFF2-40B4-BE49-F238E27FC236}">
-                <a16:creationId xmlns:a16="http://schemas.microsoft.com/office/drawing/2014/main" id="{A1E84375-31A6-295B-89A5-96EE267A43A8}"/>
-              </a:ext>
-            </a:extLst>
-          </p:cNvPr>
-          <p:cNvSpPr/>
-          <p:nvPr/>
-        </p:nvSpPr>
-        <p:spPr>
-          <a:xfrm>
-            <a:off x="1432408" y="438912"/>
-            <a:ext cx="9144000" cy="320040"/>
-          </a:xfrm>
-          <a:prstGeom prst="rect">
-            <a:avLst/>
-          </a:prstGeom>
-          <a:noFill/>
-          <a:ln/>
-        </p:spPr>
-        <p:txBody>
-          <a:bodyPr wrap="square" rtlCol="0" anchor="ctr"/>
-          <a:lstStyle/>
-          <a:p>
-            <a:pPr marL="0" indent="0">
-              <a:buNone/>
-            </a:pPr>
-            <a:r>
-              <a:rPr lang="en-US" sz="1300" b="1" kern="0" spc="100" dirty="0">
-                <a:solidFill>
-                  <a:srgbClr val="CC6600"/>
-                </a:solidFill>
-                <a:latin typeface="微軟正黑體" panose="020B0604030504040204" pitchFamily="34" charset="-120"/>
-                <a:ea typeface="微軟正黑體" panose="020B0604030504040204" pitchFamily="34" charset="-120"/>
-                <a:cs typeface="Calibri" pitchFamily="34" charset="-120"/>
-              </a:rPr>
-              <a:t>PRODUCT</a:t>
-            </a:r>
-          </a:p>
-        </p:txBody>
-      </p:sp>
-      <p:sp>
-        <p:nvSpPr>
-          <p:cNvPr id="4" name="Text 2">
-            <a:extLst>
-              <a:ext uri="{FF2B5EF4-FFF2-40B4-BE49-F238E27FC236}">
-                <a16:creationId xmlns:a16="http://schemas.microsoft.com/office/drawing/2014/main" id="{CE0CD3E7-D601-9A9D-A53B-1CE068CF6475}"/>
-              </a:ext>
-            </a:extLst>
-          </p:cNvPr>
-          <p:cNvSpPr/>
-          <p:nvPr/>
-        </p:nvSpPr>
-        <p:spPr>
-          <a:xfrm>
-            <a:off x="1432408" y="722376"/>
-            <a:ext cx="9601200" cy="548640"/>
-          </a:xfrm>
-          <a:prstGeom prst="rect">
-            <a:avLst/>
-          </a:prstGeom>
-          <a:noFill/>
-          <a:ln/>
-        </p:spPr>
-        <p:txBody>
-          <a:bodyPr wrap="square" rtlCol="0" anchor="ctr"/>
-          <a:lstStyle/>
-          <a:p>
-            <a:pPr marL="0" indent="0">
-              <a:buNone/>
-            </a:pPr>
-            <a:r>
-              <a:rPr lang="zh-TW" altLang="en-US" sz="2800" b="1" dirty="0">
-                <a:solidFill>
-                  <a:srgbClr val="1E293B"/>
-                </a:solidFill>
-                <a:latin typeface="微軟正黑體" panose="020B0604030504040204" pitchFamily="34" charset="-120"/>
-                <a:ea typeface="微軟正黑體" panose="020B0604030504040204" pitchFamily="34" charset="-120"/>
-                <a:cs typeface="Cambria" pitchFamily="34" charset="-120"/>
-              </a:rPr>
-              <a:t>新增商品</a:t>
-            </a:r>
-          </a:p>
-        </p:txBody>
-      </p:sp>
-      <p:sp>
-        <p:nvSpPr>
           <p:cNvPr id="23" name="Shape 3">
             <a:extLst>
               <a:ext uri="{FF2B5EF4-FFF2-40B4-BE49-F238E27FC236}">
@@ -9962,36 +9736,88 @@
           </a:p>
         </p:txBody>
       </p:sp>
-      <p:pic>
-        <p:nvPicPr>
-          <p:cNvPr id="38" name="Image 0" descr="preencoded.png">
-            <a:extLst>
-              <a:ext uri="{FF2B5EF4-FFF2-40B4-BE49-F238E27FC236}">
-                <a16:creationId xmlns:a16="http://schemas.microsoft.com/office/drawing/2014/main" id="{00547D6C-BECE-6ED9-E21E-7EF125833D35}"/>
-              </a:ext>
-            </a:extLst>
-          </p:cNvPr>
-          <p:cNvPicPr>
-            <a:picLocks noChangeAspect="1"/>
-          </p:cNvPicPr>
-          <p:nvPr/>
-        </p:nvPicPr>
-        <p:blipFill>
-          <a:blip r:embed="rId2"/>
-          <a:stretch>
-            <a:fillRect/>
-          </a:stretch>
-        </p:blipFill>
-        <p:spPr>
-          <a:xfrm>
-            <a:off x="771190" y="725635"/>
-            <a:ext cx="293967" cy="293967"/>
-          </a:xfrm>
-          <a:prstGeom prst="rect">
-            <a:avLst/>
-          </a:prstGeom>
-        </p:spPr>
-      </p:pic>
+      <p:sp>
+        <p:nvSpPr>
+          <p:cNvPr id="6" name="Text 1">
+            <a:extLst>
+              <a:ext uri="{FF2B5EF4-FFF2-40B4-BE49-F238E27FC236}">
+                <a16:creationId xmlns:a16="http://schemas.microsoft.com/office/drawing/2014/main" id="{21B40012-D55C-536D-B376-710EF6336761}"/>
+              </a:ext>
+            </a:extLst>
+          </p:cNvPr>
+          <p:cNvSpPr/>
+          <p:nvPr/>
+        </p:nvSpPr>
+        <p:spPr>
+          <a:xfrm>
+            <a:off x="792328" y="515112"/>
+            <a:ext cx="9784080" cy="320040"/>
+          </a:xfrm>
+          <a:prstGeom prst="rect">
+            <a:avLst/>
+          </a:prstGeom>
+          <a:noFill/>
+          <a:ln/>
+        </p:spPr>
+        <p:txBody>
+          <a:bodyPr wrap="square" rtlCol="0" anchor="ctr"/>
+          <a:lstStyle/>
+          <a:p>
+            <a:r>
+              <a:rPr lang="en-US" altLang="zh-TW" sz="1200" b="1" kern="0" spc="100" dirty="0">
+                <a:solidFill>
+                  <a:srgbClr val="CC6600"/>
+                </a:solidFill>
+                <a:latin typeface="微軟正黑體" panose="020B0604030504040204" pitchFamily="34" charset="-120"/>
+                <a:ea typeface="微軟正黑體" panose="020B0604030504040204" pitchFamily="34" charset="-120"/>
+                <a:cs typeface="Calibri" pitchFamily="34" charset="-120"/>
+              </a:rPr>
+              <a:t>PRODUCT</a:t>
+            </a:r>
+          </a:p>
+        </p:txBody>
+      </p:sp>
+      <p:sp>
+        <p:nvSpPr>
+          <p:cNvPr id="8" name="Text 2">
+            <a:extLst>
+              <a:ext uri="{FF2B5EF4-FFF2-40B4-BE49-F238E27FC236}">
+                <a16:creationId xmlns:a16="http://schemas.microsoft.com/office/drawing/2014/main" id="{A1ECD1B5-46E2-185B-7A8E-B70721C7DD1D}"/>
+              </a:ext>
+            </a:extLst>
+          </p:cNvPr>
+          <p:cNvSpPr/>
+          <p:nvPr/>
+        </p:nvSpPr>
+        <p:spPr>
+          <a:xfrm>
+            <a:off x="792328" y="823976"/>
+            <a:ext cx="10241280" cy="548640"/>
+          </a:xfrm>
+          <a:prstGeom prst="rect">
+            <a:avLst/>
+          </a:prstGeom>
+          <a:noFill/>
+          <a:ln/>
+        </p:spPr>
+        <p:txBody>
+          <a:bodyPr wrap="square" rtlCol="0" anchor="ctr"/>
+          <a:lstStyle/>
+          <a:p>
+            <a:r>
+              <a:rPr lang="zh-TW" altLang="en-US" sz="2800" b="1" dirty="0">
+                <a:solidFill>
+                  <a:srgbClr val="1E293B"/>
+                </a:solidFill>
+                <a:latin typeface="微軟正黑體" panose="020B0604030504040204" pitchFamily="34" charset="-120"/>
+                <a:ea typeface="微軟正黑體" panose="020B0604030504040204" pitchFamily="34" charset="-120"/>
+                <a:cs typeface="Cambria" pitchFamily="34" charset="-120"/>
+              </a:rPr>
+              <a:t>新增商品</a:t>
+            </a:r>
+          </a:p>
+        </p:txBody>
+      </p:sp>
     </p:spTree>
     <p:extLst>
       <p:ext uri="{BB962C8B-B14F-4D97-AF65-F5344CB8AC3E}">
@@ -10054,94 +9880,6 @@
       </p:sp>
       <p:sp>
         <p:nvSpPr>
-          <p:cNvPr id="3" name="Text 1">
-            <a:extLst>
-              <a:ext uri="{FF2B5EF4-FFF2-40B4-BE49-F238E27FC236}">
-                <a16:creationId xmlns:a16="http://schemas.microsoft.com/office/drawing/2014/main" id="{F0A51451-DA66-5CE8-C120-C852A3C08E04}"/>
-              </a:ext>
-            </a:extLst>
-          </p:cNvPr>
-          <p:cNvSpPr/>
-          <p:nvPr/>
-        </p:nvSpPr>
-        <p:spPr>
-          <a:xfrm>
-            <a:off x="1432408" y="438912"/>
-            <a:ext cx="9144000" cy="320040"/>
-          </a:xfrm>
-          <a:prstGeom prst="rect">
-            <a:avLst/>
-          </a:prstGeom>
-          <a:noFill/>
-          <a:ln/>
-        </p:spPr>
-        <p:txBody>
-          <a:bodyPr wrap="square" rtlCol="0" anchor="ctr"/>
-          <a:lstStyle/>
-          <a:p>
-            <a:pPr marL="0" indent="0">
-              <a:buNone/>
-            </a:pPr>
-            <a:r>
-              <a:rPr lang="en-US" sz="1300" b="1" kern="0" spc="100" dirty="0">
-                <a:solidFill>
-                  <a:srgbClr val="CC6600"/>
-                </a:solidFill>
-                <a:latin typeface="微軟正黑體" panose="020B0604030504040204" pitchFamily="34" charset="-120"/>
-                <a:ea typeface="微軟正黑體" panose="020B0604030504040204" pitchFamily="34" charset="-120"/>
-                <a:cs typeface="Calibri" pitchFamily="34" charset="-120"/>
-              </a:rPr>
-              <a:t>STOCK</a:t>
-            </a:r>
-          </a:p>
-        </p:txBody>
-      </p:sp>
-      <p:sp>
-        <p:nvSpPr>
-          <p:cNvPr id="4" name="Text 2">
-            <a:extLst>
-              <a:ext uri="{FF2B5EF4-FFF2-40B4-BE49-F238E27FC236}">
-                <a16:creationId xmlns:a16="http://schemas.microsoft.com/office/drawing/2014/main" id="{92D8F0D8-5E54-2271-494C-67941ACEA6AE}"/>
-              </a:ext>
-            </a:extLst>
-          </p:cNvPr>
-          <p:cNvSpPr/>
-          <p:nvPr/>
-        </p:nvSpPr>
-        <p:spPr>
-          <a:xfrm>
-            <a:off x="1432408" y="722376"/>
-            <a:ext cx="9601200" cy="548640"/>
-          </a:xfrm>
-          <a:prstGeom prst="rect">
-            <a:avLst/>
-          </a:prstGeom>
-          <a:noFill/>
-          <a:ln/>
-        </p:spPr>
-        <p:txBody>
-          <a:bodyPr wrap="square" rtlCol="0" anchor="ctr"/>
-          <a:lstStyle/>
-          <a:p>
-            <a:pPr marL="0" indent="0">
-              <a:buNone/>
-            </a:pPr>
-            <a:r>
-              <a:rPr lang="zh-TW" altLang="en-US" sz="2800" b="1" dirty="0">
-                <a:solidFill>
-                  <a:srgbClr val="1E293B"/>
-                </a:solidFill>
-                <a:latin typeface="微軟正黑體" panose="020B0604030504040204" pitchFamily="34" charset="-120"/>
-                <a:ea typeface="微軟正黑體" panose="020B0604030504040204" pitchFamily="34" charset="-120"/>
-                <a:cs typeface="Cambria" pitchFamily="34" charset="-120"/>
-              </a:rPr>
-              <a:t>庫存總表</a:t>
-            </a:r>
-          </a:p>
-        </p:txBody>
-      </p:sp>
-      <p:sp>
-        <p:nvSpPr>
           <p:cNvPr id="5" name="Shape 4">
             <a:extLst>
               <a:ext uri="{FF2B5EF4-FFF2-40B4-BE49-F238E27FC236}">
@@ -10834,36 +10572,88 @@
           </a:p>
         </p:txBody>
       </p:sp>
-      <p:pic>
-        <p:nvPicPr>
-          <p:cNvPr id="18" name="Image 0" descr="preencoded.png">
-            <a:extLst>
-              <a:ext uri="{FF2B5EF4-FFF2-40B4-BE49-F238E27FC236}">
-                <a16:creationId xmlns:a16="http://schemas.microsoft.com/office/drawing/2014/main" id="{23520DFA-F454-E6D3-CE39-4DC1EA71EE08}"/>
-              </a:ext>
-            </a:extLst>
-          </p:cNvPr>
-          <p:cNvPicPr>
-            <a:picLocks noChangeAspect="1"/>
-          </p:cNvPicPr>
-          <p:nvPr/>
-        </p:nvPicPr>
-        <p:blipFill>
-          <a:blip r:embed="rId2"/>
-          <a:stretch>
-            <a:fillRect/>
-          </a:stretch>
-        </p:blipFill>
-        <p:spPr>
-          <a:xfrm>
-            <a:off x="727686" y="660729"/>
-            <a:ext cx="379476" cy="379476"/>
-          </a:xfrm>
-          <a:prstGeom prst="rect">
-            <a:avLst/>
-          </a:prstGeom>
-        </p:spPr>
-      </p:pic>
+      <p:sp>
+        <p:nvSpPr>
+          <p:cNvPr id="19" name="Text 1">
+            <a:extLst>
+              <a:ext uri="{FF2B5EF4-FFF2-40B4-BE49-F238E27FC236}">
+                <a16:creationId xmlns:a16="http://schemas.microsoft.com/office/drawing/2014/main" id="{CFED083B-D1A3-7676-3C1B-14072616032E}"/>
+              </a:ext>
+            </a:extLst>
+          </p:cNvPr>
+          <p:cNvSpPr/>
+          <p:nvPr/>
+        </p:nvSpPr>
+        <p:spPr>
+          <a:xfrm>
+            <a:off x="792328" y="515112"/>
+            <a:ext cx="9784080" cy="320040"/>
+          </a:xfrm>
+          <a:prstGeom prst="rect">
+            <a:avLst/>
+          </a:prstGeom>
+          <a:noFill/>
+          <a:ln/>
+        </p:spPr>
+        <p:txBody>
+          <a:bodyPr wrap="square" rtlCol="0" anchor="ctr"/>
+          <a:lstStyle/>
+          <a:p>
+            <a:r>
+              <a:rPr lang="en-US" altLang="zh-TW" sz="1200" b="1" kern="0" spc="100" dirty="0">
+                <a:solidFill>
+                  <a:srgbClr val="CC6600"/>
+                </a:solidFill>
+                <a:latin typeface="微軟正黑體" panose="020B0604030504040204" pitchFamily="34" charset="-120"/>
+                <a:ea typeface="微軟正黑體" panose="020B0604030504040204" pitchFamily="34" charset="-120"/>
+                <a:cs typeface="Calibri" pitchFamily="34" charset="-120"/>
+              </a:rPr>
+              <a:t>STOCK</a:t>
+            </a:r>
+          </a:p>
+        </p:txBody>
+      </p:sp>
+      <p:sp>
+        <p:nvSpPr>
+          <p:cNvPr id="21" name="Text 2">
+            <a:extLst>
+              <a:ext uri="{FF2B5EF4-FFF2-40B4-BE49-F238E27FC236}">
+                <a16:creationId xmlns:a16="http://schemas.microsoft.com/office/drawing/2014/main" id="{69483DA7-B919-723E-F247-F4DB43C01060}"/>
+              </a:ext>
+            </a:extLst>
+          </p:cNvPr>
+          <p:cNvSpPr/>
+          <p:nvPr/>
+        </p:nvSpPr>
+        <p:spPr>
+          <a:xfrm>
+            <a:off x="792328" y="823976"/>
+            <a:ext cx="10241280" cy="548640"/>
+          </a:xfrm>
+          <a:prstGeom prst="rect">
+            <a:avLst/>
+          </a:prstGeom>
+          <a:noFill/>
+          <a:ln/>
+        </p:spPr>
+        <p:txBody>
+          <a:bodyPr wrap="square" rtlCol="0" anchor="ctr"/>
+          <a:lstStyle/>
+          <a:p>
+            <a:r>
+              <a:rPr lang="zh-TW" altLang="en-US" sz="2800" b="1" dirty="0">
+                <a:solidFill>
+                  <a:srgbClr val="1E293B"/>
+                </a:solidFill>
+                <a:latin typeface="微軟正黑體" panose="020B0604030504040204" pitchFamily="34" charset="-120"/>
+                <a:ea typeface="微軟正黑體" panose="020B0604030504040204" pitchFamily="34" charset="-120"/>
+                <a:cs typeface="Cambria" pitchFamily="34" charset="-120"/>
+              </a:rPr>
+              <a:t>庫存總表</a:t>
+            </a:r>
+          </a:p>
+        </p:txBody>
+      </p:sp>
     </p:spTree>
     <p:extLst>
       <p:ext uri="{BB962C8B-B14F-4D97-AF65-F5344CB8AC3E}">
@@ -10926,94 +10716,6 @@
       </p:sp>
       <p:sp>
         <p:nvSpPr>
-          <p:cNvPr id="3" name="Text 1">
-            <a:extLst>
-              <a:ext uri="{FF2B5EF4-FFF2-40B4-BE49-F238E27FC236}">
-                <a16:creationId xmlns:a16="http://schemas.microsoft.com/office/drawing/2014/main" id="{4E38EBB8-02A5-4D9E-1C6E-9155F22B78B5}"/>
-              </a:ext>
-            </a:extLst>
-          </p:cNvPr>
-          <p:cNvSpPr/>
-          <p:nvPr/>
-        </p:nvSpPr>
-        <p:spPr>
-          <a:xfrm>
-            <a:off x="1432408" y="438912"/>
-            <a:ext cx="9144000" cy="320040"/>
-          </a:xfrm>
-          <a:prstGeom prst="rect">
-            <a:avLst/>
-          </a:prstGeom>
-          <a:noFill/>
-          <a:ln/>
-        </p:spPr>
-        <p:txBody>
-          <a:bodyPr wrap="square" rtlCol="0" anchor="ctr"/>
-          <a:lstStyle/>
-          <a:p>
-            <a:pPr marL="0" indent="0">
-              <a:buNone/>
-            </a:pPr>
-            <a:r>
-              <a:rPr lang="en-US" sz="1300" b="1" kern="0" spc="100" dirty="0">
-                <a:solidFill>
-                  <a:srgbClr val="CC6600"/>
-                </a:solidFill>
-                <a:latin typeface="微軟正黑體" panose="020B0604030504040204" pitchFamily="34" charset="-120"/>
-                <a:ea typeface="微軟正黑體" panose="020B0604030504040204" pitchFamily="34" charset="-120"/>
-                <a:cs typeface="Calibri" pitchFamily="34" charset="-120"/>
-              </a:rPr>
-              <a:t>PURCHASE ORDER (PO) </a:t>
-            </a:r>
-          </a:p>
-        </p:txBody>
-      </p:sp>
-      <p:sp>
-        <p:nvSpPr>
-          <p:cNvPr id="4" name="Text 2">
-            <a:extLst>
-              <a:ext uri="{FF2B5EF4-FFF2-40B4-BE49-F238E27FC236}">
-                <a16:creationId xmlns:a16="http://schemas.microsoft.com/office/drawing/2014/main" id="{54EB4C0A-2E85-61FB-ABD3-152A11551E3F}"/>
-              </a:ext>
-            </a:extLst>
-          </p:cNvPr>
-          <p:cNvSpPr/>
-          <p:nvPr/>
-        </p:nvSpPr>
-        <p:spPr>
-          <a:xfrm>
-            <a:off x="1432408" y="722376"/>
-            <a:ext cx="9601200" cy="548640"/>
-          </a:xfrm>
-          <a:prstGeom prst="rect">
-            <a:avLst/>
-          </a:prstGeom>
-          <a:noFill/>
-          <a:ln/>
-        </p:spPr>
-        <p:txBody>
-          <a:bodyPr wrap="square" rtlCol="0" anchor="ctr"/>
-          <a:lstStyle/>
-          <a:p>
-            <a:pPr marL="0" indent="0">
-              <a:buNone/>
-            </a:pPr>
-            <a:r>
-              <a:rPr lang="zh-TW" altLang="en-US" sz="2800" b="1" dirty="0">
-                <a:solidFill>
-                  <a:srgbClr val="1E293B"/>
-                </a:solidFill>
-                <a:latin typeface="微軟正黑體" panose="020B0604030504040204" pitchFamily="34" charset="-120"/>
-                <a:ea typeface="微軟正黑體" panose="020B0604030504040204" pitchFamily="34" charset="-120"/>
-                <a:cs typeface="Cambria" pitchFamily="34" charset="-120"/>
-              </a:rPr>
-              <a:t>採購進貨單</a:t>
-            </a:r>
-          </a:p>
-        </p:txBody>
-      </p:sp>
-      <p:sp>
-        <p:nvSpPr>
           <p:cNvPr id="5" name="Shape 4">
             <a:extLst>
               <a:ext uri="{FF2B5EF4-FFF2-40B4-BE49-F238E27FC236}">
@@ -11739,36 +11441,6 @@
           </a:p>
         </p:txBody>
       </p:sp>
-      <p:pic>
-        <p:nvPicPr>
-          <p:cNvPr id="20" name="Image 0" descr="preencoded.png">
-            <a:extLst>
-              <a:ext uri="{FF2B5EF4-FFF2-40B4-BE49-F238E27FC236}">
-                <a16:creationId xmlns:a16="http://schemas.microsoft.com/office/drawing/2014/main" id="{94B884BA-729F-8489-0FCD-0DED0BA8D413}"/>
-              </a:ext>
-            </a:extLst>
-          </p:cNvPr>
-          <p:cNvPicPr>
-            <a:picLocks noChangeAspect="1"/>
-          </p:cNvPicPr>
-          <p:nvPr/>
-        </p:nvPicPr>
-        <p:blipFill>
-          <a:blip r:embed="rId2"/>
-          <a:stretch>
-            <a:fillRect/>
-          </a:stretch>
-        </p:blipFill>
-        <p:spPr>
-          <a:xfrm>
-            <a:off x="715621" y="662261"/>
-            <a:ext cx="389889" cy="389889"/>
-          </a:xfrm>
-          <a:prstGeom prst="rect">
-            <a:avLst/>
-          </a:prstGeom>
-        </p:spPr>
-      </p:pic>
       <p:sp>
         <p:nvSpPr>
           <p:cNvPr id="21" name="Shape 12">
@@ -11889,6 +11561,88 @@
                 <a:cs typeface="Courier New" pitchFamily="34" charset="-120"/>
               </a:rPr>
               <a:t>付款狀態為「已付訖」後，自動回填採購進貨單為「已立帳核銷」，並依付款方式回填核銷日期（支票回填預兌日期、匯款回填付款日期）</a:t>
+            </a:r>
+          </a:p>
+        </p:txBody>
+      </p:sp>
+      <p:sp>
+        <p:nvSpPr>
+          <p:cNvPr id="18" name="Text 1">
+            <a:extLst>
+              <a:ext uri="{FF2B5EF4-FFF2-40B4-BE49-F238E27FC236}">
+                <a16:creationId xmlns:a16="http://schemas.microsoft.com/office/drawing/2014/main" id="{50CC8E32-8AA4-A6E0-2D13-0928E908A1ED}"/>
+              </a:ext>
+            </a:extLst>
+          </p:cNvPr>
+          <p:cNvSpPr/>
+          <p:nvPr/>
+        </p:nvSpPr>
+        <p:spPr>
+          <a:xfrm>
+            <a:off x="792328" y="515112"/>
+            <a:ext cx="9784080" cy="320040"/>
+          </a:xfrm>
+          <a:prstGeom prst="rect">
+            <a:avLst/>
+          </a:prstGeom>
+          <a:noFill/>
+          <a:ln/>
+        </p:spPr>
+        <p:txBody>
+          <a:bodyPr wrap="square" rtlCol="0" anchor="ctr"/>
+          <a:lstStyle/>
+          <a:p>
+            <a:r>
+              <a:rPr lang="en-US" altLang="zh-TW" sz="1200" b="1" kern="0" spc="100" dirty="0">
+                <a:solidFill>
+                  <a:srgbClr val="CC6600"/>
+                </a:solidFill>
+                <a:latin typeface="微軟正黑體" panose="020B0604030504040204" pitchFamily="34" charset="-120"/>
+                <a:ea typeface="微軟正黑體" panose="020B0604030504040204" pitchFamily="34" charset="-120"/>
+                <a:cs typeface="Calibri" pitchFamily="34" charset="-120"/>
+              </a:rPr>
+              <a:t>PURCHASE ORDER (PO) </a:t>
+            </a:r>
+          </a:p>
+        </p:txBody>
+      </p:sp>
+      <p:sp>
+        <p:nvSpPr>
+          <p:cNvPr id="24" name="Text 2">
+            <a:extLst>
+              <a:ext uri="{FF2B5EF4-FFF2-40B4-BE49-F238E27FC236}">
+                <a16:creationId xmlns:a16="http://schemas.microsoft.com/office/drawing/2014/main" id="{4ECCE6EC-7688-4004-3590-AD16560DE1F9}"/>
+              </a:ext>
+            </a:extLst>
+          </p:cNvPr>
+          <p:cNvSpPr/>
+          <p:nvPr/>
+        </p:nvSpPr>
+        <p:spPr>
+          <a:xfrm>
+            <a:off x="792328" y="823976"/>
+            <a:ext cx="10241280" cy="548640"/>
+          </a:xfrm>
+          <a:prstGeom prst="rect">
+            <a:avLst/>
+          </a:prstGeom>
+          <a:noFill/>
+          <a:ln/>
+        </p:spPr>
+        <p:txBody>
+          <a:bodyPr wrap="square" rtlCol="0" anchor="ctr"/>
+          <a:lstStyle/>
+          <a:p>
+            <a:r>
+              <a:rPr lang="zh-TW" altLang="en-US" sz="2800" b="1" dirty="0">
+                <a:solidFill>
+                  <a:srgbClr val="1E293B"/>
+                </a:solidFill>
+                <a:latin typeface="微軟正黑體" panose="020B0604030504040204" pitchFamily="34" charset="-120"/>
+                <a:ea typeface="微軟正黑體" panose="020B0604030504040204" pitchFamily="34" charset="-120"/>
+                <a:cs typeface="Cambria" pitchFamily="34" charset="-120"/>
+              </a:rPr>
+              <a:t>採購進貨單</a:t>
             </a:r>
           </a:p>
         </p:txBody>
@@ -11911,7 +11665,13 @@
   <p:cSld>
     <p:spTree>
       <p:nvGrpSpPr>
-        <p:cNvPr id="1" name=""/>
+        <p:cNvPr id="1" name="">
+          <a:extLst>
+            <a:ext uri="{FF2B5EF4-FFF2-40B4-BE49-F238E27FC236}">
+              <a16:creationId xmlns:a16="http://schemas.microsoft.com/office/drawing/2014/main" id="{8C60C9D5-6727-A2A7-6145-A880C365D3CF}"/>
+            </a:ext>
+          </a:extLst>
+        </p:cNvPr>
         <p:cNvGrpSpPr/>
         <p:nvPr/>
       </p:nvGrpSpPr>
@@ -11928,7 +11688,7 @@
           <p:cNvPr id="2" name="投影片編號版面配置區 1">
             <a:extLst>
               <a:ext uri="{FF2B5EF4-FFF2-40B4-BE49-F238E27FC236}">
-                <a16:creationId xmlns:a16="http://schemas.microsoft.com/office/drawing/2014/main" id="{ABC153D1-9AE3-8924-72A4-583C38E74F0C}"/>
+                <a16:creationId xmlns:a16="http://schemas.microsoft.com/office/drawing/2014/main" id="{B5C84BC8-7B8C-06D0-8BA5-27666AE3F5D1}"/>
               </a:ext>
             </a:extLst>
           </p:cNvPr>
@@ -11955,98 +11715,10 @@
       </p:sp>
       <p:sp>
         <p:nvSpPr>
-          <p:cNvPr id="3" name="Text 1">
-            <a:extLst>
-              <a:ext uri="{FF2B5EF4-FFF2-40B4-BE49-F238E27FC236}">
-                <a16:creationId xmlns:a16="http://schemas.microsoft.com/office/drawing/2014/main" id="{1784504B-73B7-D25B-3A03-CA48833FD32C}"/>
-              </a:ext>
-            </a:extLst>
-          </p:cNvPr>
-          <p:cNvSpPr/>
-          <p:nvPr/>
-        </p:nvSpPr>
-        <p:spPr>
-          <a:xfrm>
-            <a:off x="1432408" y="438912"/>
-            <a:ext cx="9144000" cy="320040"/>
-          </a:xfrm>
-          <a:prstGeom prst="rect">
-            <a:avLst/>
-          </a:prstGeom>
-          <a:noFill/>
-          <a:ln/>
-        </p:spPr>
-        <p:txBody>
-          <a:bodyPr wrap="square" rtlCol="0" anchor="ctr"/>
-          <a:lstStyle/>
-          <a:p>
-            <a:pPr marL="0" indent="0">
-              <a:buNone/>
-            </a:pPr>
-            <a:r>
-              <a:rPr lang="en-US" sz="1300" b="1" kern="0" spc="100" dirty="0">
-                <a:solidFill>
-                  <a:srgbClr val="CC6600"/>
-                </a:solidFill>
-                <a:latin typeface="微軟正黑體" panose="020B0604030504040204" pitchFamily="34" charset="-120"/>
-                <a:ea typeface="微軟正黑體" panose="020B0604030504040204" pitchFamily="34" charset="-120"/>
-                <a:cs typeface="Calibri" pitchFamily="34" charset="-120"/>
-              </a:rPr>
-              <a:t>ACCOUNTS PAYABLE</a:t>
-            </a:r>
-          </a:p>
-        </p:txBody>
-      </p:sp>
-      <p:sp>
-        <p:nvSpPr>
-          <p:cNvPr id="4" name="Text 2">
-            <a:extLst>
-              <a:ext uri="{FF2B5EF4-FFF2-40B4-BE49-F238E27FC236}">
-                <a16:creationId xmlns:a16="http://schemas.microsoft.com/office/drawing/2014/main" id="{216785DC-FEBF-3804-C755-5C03F6DEFD0C}"/>
-              </a:ext>
-            </a:extLst>
-          </p:cNvPr>
-          <p:cNvSpPr/>
-          <p:nvPr/>
-        </p:nvSpPr>
-        <p:spPr>
-          <a:xfrm>
-            <a:off x="1432408" y="722376"/>
-            <a:ext cx="9601200" cy="548640"/>
-          </a:xfrm>
-          <a:prstGeom prst="rect">
-            <a:avLst/>
-          </a:prstGeom>
-          <a:noFill/>
-          <a:ln/>
-        </p:spPr>
-        <p:txBody>
-          <a:bodyPr wrap="square" rtlCol="0" anchor="ctr"/>
-          <a:lstStyle/>
-          <a:p>
-            <a:pPr marL="0" indent="0">
-              <a:buNone/>
-            </a:pPr>
-            <a:r>
-              <a:rPr lang="zh-TW" altLang="en-US" sz="2800" b="1" dirty="0">
-                <a:solidFill>
-                  <a:srgbClr val="1E293B"/>
-                </a:solidFill>
-                <a:latin typeface="微軟正黑體" panose="020B0604030504040204" pitchFamily="34" charset="-120"/>
-                <a:ea typeface="微軟正黑體" panose="020B0604030504040204" pitchFamily="34" charset="-120"/>
-                <a:cs typeface="Cambria" pitchFamily="34" charset="-120"/>
-              </a:rPr>
-              <a:t>應付款項</a:t>
-            </a:r>
-          </a:p>
-        </p:txBody>
-      </p:sp>
-      <p:sp>
-        <p:nvSpPr>
           <p:cNvPr id="5" name="Shape 3">
             <a:extLst>
               <a:ext uri="{FF2B5EF4-FFF2-40B4-BE49-F238E27FC236}">
-                <a16:creationId xmlns:a16="http://schemas.microsoft.com/office/drawing/2014/main" id="{102893BB-E6C4-3174-B723-E910EB1A94A7}"/>
+                <a16:creationId xmlns:a16="http://schemas.microsoft.com/office/drawing/2014/main" id="{77F67FFD-7B2A-473B-35B2-27C068D526E6}"/>
               </a:ext>
             </a:extLst>
           </p:cNvPr>
@@ -12072,7 +11744,7 @@
           <p:cNvPr id="6" name="Text 4">
             <a:extLst>
               <a:ext uri="{FF2B5EF4-FFF2-40B4-BE49-F238E27FC236}">
-                <a16:creationId xmlns:a16="http://schemas.microsoft.com/office/drawing/2014/main" id="{B7DE71E2-62CB-876C-FA2B-3878230819AA}"/>
+                <a16:creationId xmlns:a16="http://schemas.microsoft.com/office/drawing/2014/main" id="{5131D698-465F-9005-F6D3-2A77279C8F54}"/>
               </a:ext>
             </a:extLst>
           </p:cNvPr>
@@ -12120,7 +11792,7 @@
           <p:cNvPr id="7" name="Text 5">
             <a:extLst>
               <a:ext uri="{FF2B5EF4-FFF2-40B4-BE49-F238E27FC236}">
-                <a16:creationId xmlns:a16="http://schemas.microsoft.com/office/drawing/2014/main" id="{41B34219-127F-9EFD-7EE7-1F32232F7BB4}"/>
+                <a16:creationId xmlns:a16="http://schemas.microsoft.com/office/drawing/2014/main" id="{573222C1-2359-6985-1225-899062172BC3}"/>
               </a:ext>
             </a:extLst>
           </p:cNvPr>
@@ -12302,7 +11974,7 @@
           <p:cNvPr id="8" name="Shape 6">
             <a:extLst>
               <a:ext uri="{FF2B5EF4-FFF2-40B4-BE49-F238E27FC236}">
-                <a16:creationId xmlns:a16="http://schemas.microsoft.com/office/drawing/2014/main" id="{B1C8F753-72A8-AF2B-2317-A073130A8C78}"/>
+                <a16:creationId xmlns:a16="http://schemas.microsoft.com/office/drawing/2014/main" id="{2E418BB8-F1C5-D3E6-C986-7796E7FEFD53}"/>
               </a:ext>
             </a:extLst>
           </p:cNvPr>
@@ -12328,7 +12000,7 @@
           <p:cNvPr id="9" name="Text 7">
             <a:extLst>
               <a:ext uri="{FF2B5EF4-FFF2-40B4-BE49-F238E27FC236}">
-                <a16:creationId xmlns:a16="http://schemas.microsoft.com/office/drawing/2014/main" id="{3FFEEF89-0BEA-6838-E8AC-32CD5238863E}"/>
+                <a16:creationId xmlns:a16="http://schemas.microsoft.com/office/drawing/2014/main" id="{5D22B204-4C81-4627-F174-0F17E58700B0}"/>
               </a:ext>
             </a:extLst>
           </p:cNvPr>
@@ -12376,7 +12048,7 @@
           <p:cNvPr id="10" name="Text 8">
             <a:extLst>
               <a:ext uri="{FF2B5EF4-FFF2-40B4-BE49-F238E27FC236}">
-                <a16:creationId xmlns:a16="http://schemas.microsoft.com/office/drawing/2014/main" id="{503934D5-8146-F7F1-E592-C8BD4E223AE6}"/>
+                <a16:creationId xmlns:a16="http://schemas.microsoft.com/office/drawing/2014/main" id="{418E7478-9A08-EBAE-14F2-B0FFA6ACDA03}"/>
               </a:ext>
             </a:extLst>
           </p:cNvPr>
@@ -12427,7 +12099,7 @@
           <p:cNvPr id="11" name="Shape 9">
             <a:extLst>
               <a:ext uri="{FF2B5EF4-FFF2-40B4-BE49-F238E27FC236}">
-                <a16:creationId xmlns:a16="http://schemas.microsoft.com/office/drawing/2014/main" id="{1EEE3B73-D064-72A9-8DFA-A20B53BC93E8}"/>
+                <a16:creationId xmlns:a16="http://schemas.microsoft.com/office/drawing/2014/main" id="{1F2D183F-C9B2-233C-446B-2F0DDB7434AF}"/>
               </a:ext>
             </a:extLst>
           </p:cNvPr>
@@ -12453,7 +12125,7 @@
           <p:cNvPr id="12" name="Text 10">
             <a:extLst>
               <a:ext uri="{FF2B5EF4-FFF2-40B4-BE49-F238E27FC236}">
-                <a16:creationId xmlns:a16="http://schemas.microsoft.com/office/drawing/2014/main" id="{54B7DB74-27E8-E7F7-EBEE-D65B3DB317BA}"/>
+                <a16:creationId xmlns:a16="http://schemas.microsoft.com/office/drawing/2014/main" id="{9FE590C0-87E6-66C7-370A-973A92C829F1}"/>
               </a:ext>
             </a:extLst>
           </p:cNvPr>
@@ -12501,7 +12173,7 @@
           <p:cNvPr id="13" name="Text 11">
             <a:extLst>
               <a:ext uri="{FF2B5EF4-FFF2-40B4-BE49-F238E27FC236}">
-                <a16:creationId xmlns:a16="http://schemas.microsoft.com/office/drawing/2014/main" id="{62A9FEB7-B9B6-25C8-5234-90BEBE4A761D}"/>
+                <a16:creationId xmlns:a16="http://schemas.microsoft.com/office/drawing/2014/main" id="{6DF9D9BC-60EB-6C50-22F0-6D2871D82916}"/>
               </a:ext>
             </a:extLst>
           </p:cNvPr>
@@ -12552,7 +12224,7 @@
           <p:cNvPr id="14" name="Shape 12">
             <a:extLst>
               <a:ext uri="{FF2B5EF4-FFF2-40B4-BE49-F238E27FC236}">
-                <a16:creationId xmlns:a16="http://schemas.microsoft.com/office/drawing/2014/main" id="{4B71CFFF-BFC3-1A58-F8AC-70AD5B5E2E7E}"/>
+                <a16:creationId xmlns:a16="http://schemas.microsoft.com/office/drawing/2014/main" id="{93142FCF-18F8-DD9C-7BAA-2B40F3C8EBDD}"/>
               </a:ext>
             </a:extLst>
           </p:cNvPr>
@@ -12585,7 +12257,7 @@
           <p:cNvPr id="15" name="Text 13">
             <a:extLst>
               <a:ext uri="{FF2B5EF4-FFF2-40B4-BE49-F238E27FC236}">
-                <a16:creationId xmlns:a16="http://schemas.microsoft.com/office/drawing/2014/main" id="{1292C31C-54E0-7C3D-A2FC-64C87570A0D8}"/>
+                <a16:creationId xmlns:a16="http://schemas.microsoft.com/office/drawing/2014/main" id="{4F74E72E-1F82-43CE-DE69-BE8C6CCDD6C8}"/>
               </a:ext>
             </a:extLst>
           </p:cNvPr>
@@ -12633,7 +12305,7 @@
           <p:cNvPr id="16" name="Text 14">
             <a:extLst>
               <a:ext uri="{FF2B5EF4-FFF2-40B4-BE49-F238E27FC236}">
-                <a16:creationId xmlns:a16="http://schemas.microsoft.com/office/drawing/2014/main" id="{DF6D1856-95EB-0C28-D505-E7C954810B66}"/>
+                <a16:creationId xmlns:a16="http://schemas.microsoft.com/office/drawing/2014/main" id="{63A4F75C-7694-A51D-2F66-69CF84E91530}"/>
               </a:ext>
             </a:extLst>
           </p:cNvPr>
@@ -12679,40 +12351,92 @@
           </a:p>
         </p:txBody>
       </p:sp>
-      <p:pic>
-        <p:nvPicPr>
-          <p:cNvPr id="17" name="Image 3" descr="preencoded.png">
-            <a:extLst>
-              <a:ext uri="{FF2B5EF4-FFF2-40B4-BE49-F238E27FC236}">
-                <a16:creationId xmlns:a16="http://schemas.microsoft.com/office/drawing/2014/main" id="{F1C3574C-36B7-D19C-1451-51E50372B67C}"/>
-              </a:ext>
-            </a:extLst>
-          </p:cNvPr>
-          <p:cNvPicPr>
-            <a:picLocks noChangeAspect="1"/>
-          </p:cNvPicPr>
-          <p:nvPr/>
-        </p:nvPicPr>
-        <p:blipFill>
-          <a:blip r:embed="rId2"/>
-          <a:stretch>
-            <a:fillRect/>
-          </a:stretch>
-        </p:blipFill>
-        <p:spPr>
-          <a:xfrm>
-            <a:off x="727920" y="643621"/>
-            <a:ext cx="395021" cy="395021"/>
-          </a:xfrm>
-          <a:prstGeom prst="rect">
-            <a:avLst/>
-          </a:prstGeom>
-        </p:spPr>
-      </p:pic>
+      <p:sp>
+        <p:nvSpPr>
+          <p:cNvPr id="19" name="Text 1">
+            <a:extLst>
+              <a:ext uri="{FF2B5EF4-FFF2-40B4-BE49-F238E27FC236}">
+                <a16:creationId xmlns:a16="http://schemas.microsoft.com/office/drawing/2014/main" id="{796D903A-B869-6D07-2E50-EE0810187C91}"/>
+              </a:ext>
+            </a:extLst>
+          </p:cNvPr>
+          <p:cNvSpPr/>
+          <p:nvPr/>
+        </p:nvSpPr>
+        <p:spPr>
+          <a:xfrm>
+            <a:off x="792328" y="515112"/>
+            <a:ext cx="9784080" cy="320040"/>
+          </a:xfrm>
+          <a:prstGeom prst="rect">
+            <a:avLst/>
+          </a:prstGeom>
+          <a:noFill/>
+          <a:ln/>
+        </p:spPr>
+        <p:txBody>
+          <a:bodyPr wrap="square" rtlCol="0" anchor="ctr"/>
+          <a:lstStyle/>
+          <a:p>
+            <a:r>
+              <a:rPr lang="en-US" altLang="zh-TW" sz="1200" b="1" kern="0" spc="100" dirty="0">
+                <a:solidFill>
+                  <a:srgbClr val="CC6600"/>
+                </a:solidFill>
+                <a:latin typeface="微軟正黑體" panose="020B0604030504040204" pitchFamily="34" charset="-120"/>
+                <a:ea typeface="微軟正黑體" panose="020B0604030504040204" pitchFamily="34" charset="-120"/>
+                <a:cs typeface="Calibri" pitchFamily="34" charset="-120"/>
+              </a:rPr>
+              <a:t>ACCOUNTS PAYABLE</a:t>
+            </a:r>
+          </a:p>
+        </p:txBody>
+      </p:sp>
+      <p:sp>
+        <p:nvSpPr>
+          <p:cNvPr id="21" name="Text 2">
+            <a:extLst>
+              <a:ext uri="{FF2B5EF4-FFF2-40B4-BE49-F238E27FC236}">
+                <a16:creationId xmlns:a16="http://schemas.microsoft.com/office/drawing/2014/main" id="{06CB41FD-5589-9EED-DA01-ABB8F47BDF29}"/>
+              </a:ext>
+            </a:extLst>
+          </p:cNvPr>
+          <p:cNvSpPr/>
+          <p:nvPr/>
+        </p:nvSpPr>
+        <p:spPr>
+          <a:xfrm>
+            <a:off x="792328" y="823976"/>
+            <a:ext cx="10241280" cy="548640"/>
+          </a:xfrm>
+          <a:prstGeom prst="rect">
+            <a:avLst/>
+          </a:prstGeom>
+          <a:noFill/>
+          <a:ln/>
+        </p:spPr>
+        <p:txBody>
+          <a:bodyPr wrap="square" rtlCol="0" anchor="ctr"/>
+          <a:lstStyle/>
+          <a:p>
+            <a:r>
+              <a:rPr lang="zh-TW" altLang="en-US" sz="2800" b="1" dirty="0">
+                <a:solidFill>
+                  <a:srgbClr val="1E293B"/>
+                </a:solidFill>
+                <a:latin typeface="微軟正黑體" panose="020B0604030504040204" pitchFamily="34" charset="-120"/>
+                <a:ea typeface="微軟正黑體" panose="020B0604030504040204" pitchFamily="34" charset="-120"/>
+                <a:cs typeface="Cambria" pitchFamily="34" charset="-120"/>
+              </a:rPr>
+              <a:t>應付款項</a:t>
+            </a:r>
+          </a:p>
+        </p:txBody>
+      </p:sp>
     </p:spTree>
     <p:extLst>
       <p:ext uri="{BB962C8B-B14F-4D97-AF65-F5344CB8AC3E}">
-        <p14:creationId xmlns:p14="http://schemas.microsoft.com/office/powerpoint/2010/main" val="2615931190"/>
+        <p14:creationId xmlns:p14="http://schemas.microsoft.com/office/powerpoint/2010/main" val="571678596"/>
       </p:ext>
     </p:extLst>
   </p:cSld>
@@ -12771,94 +12495,6 @@
       </p:sp>
       <p:sp>
         <p:nvSpPr>
-          <p:cNvPr id="3" name="Text 1">
-            <a:extLst>
-              <a:ext uri="{FF2B5EF4-FFF2-40B4-BE49-F238E27FC236}">
-                <a16:creationId xmlns:a16="http://schemas.microsoft.com/office/drawing/2014/main" id="{B20C0ED9-CF6A-1A02-0A20-59B39DF8EF2E}"/>
-              </a:ext>
-            </a:extLst>
-          </p:cNvPr>
-          <p:cNvSpPr/>
-          <p:nvPr/>
-        </p:nvSpPr>
-        <p:spPr>
-          <a:xfrm>
-            <a:off x="1432408" y="438912"/>
-            <a:ext cx="9144000" cy="320040"/>
-          </a:xfrm>
-          <a:prstGeom prst="rect">
-            <a:avLst/>
-          </a:prstGeom>
-          <a:noFill/>
-          <a:ln/>
-        </p:spPr>
-        <p:txBody>
-          <a:bodyPr wrap="square" rtlCol="0" anchor="ctr"/>
-          <a:lstStyle/>
-          <a:p>
-            <a:pPr marL="0" indent="0">
-              <a:buNone/>
-            </a:pPr>
-            <a:r>
-              <a:rPr lang="en-US" sz="1300" b="1" kern="0" spc="100" dirty="0">
-                <a:solidFill>
-                  <a:srgbClr val="CC6600"/>
-                </a:solidFill>
-                <a:latin typeface="微軟正黑體" panose="020B0604030504040204" pitchFamily="34" charset="-120"/>
-                <a:ea typeface="微軟正黑體" panose="020B0604030504040204" pitchFamily="34" charset="-120"/>
-                <a:cs typeface="Calibri" pitchFamily="34" charset="-120"/>
-              </a:rPr>
-              <a:t>SHIPPING ORDER (SO)</a:t>
-            </a:r>
-          </a:p>
-        </p:txBody>
-      </p:sp>
-      <p:sp>
-        <p:nvSpPr>
-          <p:cNvPr id="4" name="Text 2">
-            <a:extLst>
-              <a:ext uri="{FF2B5EF4-FFF2-40B4-BE49-F238E27FC236}">
-                <a16:creationId xmlns:a16="http://schemas.microsoft.com/office/drawing/2014/main" id="{747D2C44-9293-A2D9-7FF0-746D528AE7BB}"/>
-              </a:ext>
-            </a:extLst>
-          </p:cNvPr>
-          <p:cNvSpPr/>
-          <p:nvPr/>
-        </p:nvSpPr>
-        <p:spPr>
-          <a:xfrm>
-            <a:off x="1432408" y="722376"/>
-            <a:ext cx="9601200" cy="548640"/>
-          </a:xfrm>
-          <a:prstGeom prst="rect">
-            <a:avLst/>
-          </a:prstGeom>
-          <a:noFill/>
-          <a:ln/>
-        </p:spPr>
-        <p:txBody>
-          <a:bodyPr wrap="square" rtlCol="0" anchor="ctr"/>
-          <a:lstStyle/>
-          <a:p>
-            <a:pPr marL="0" indent="0">
-              <a:buNone/>
-            </a:pPr>
-            <a:r>
-              <a:rPr lang="zh-TW" altLang="en-US" sz="2800" b="1" dirty="0">
-                <a:solidFill>
-                  <a:srgbClr val="1E293B"/>
-                </a:solidFill>
-                <a:latin typeface="微軟正黑體" panose="020B0604030504040204" pitchFamily="34" charset="-120"/>
-                <a:ea typeface="微軟正黑體" panose="020B0604030504040204" pitchFamily="34" charset="-120"/>
-                <a:cs typeface="Cambria" pitchFamily="34" charset="-120"/>
-              </a:rPr>
-              <a:t>銷貨出貨單</a:t>
-            </a:r>
-          </a:p>
-        </p:txBody>
-      </p:sp>
-      <p:sp>
-        <p:nvSpPr>
           <p:cNvPr id="5" name="Shape 4">
             <a:extLst>
               <a:ext uri="{FF2B5EF4-FFF2-40B4-BE49-F238E27FC236}">
@@ -13382,36 +13018,88 @@
           </a:p>
         </p:txBody>
       </p:sp>
-      <p:pic>
-        <p:nvPicPr>
-          <p:cNvPr id="17" name="Image 0" descr="preencoded.png">
-            <a:extLst>
-              <a:ext uri="{FF2B5EF4-FFF2-40B4-BE49-F238E27FC236}">
-                <a16:creationId xmlns:a16="http://schemas.microsoft.com/office/drawing/2014/main" id="{ABBB9E78-97BA-9F54-13A0-029860BC78A0}"/>
-              </a:ext>
-            </a:extLst>
-          </p:cNvPr>
-          <p:cNvPicPr>
-            <a:picLocks noChangeAspect="1"/>
-          </p:cNvPicPr>
-          <p:nvPr/>
-        </p:nvPicPr>
-        <p:blipFill>
-          <a:blip r:embed="rId2"/>
-          <a:stretch>
-            <a:fillRect/>
-          </a:stretch>
-        </p:blipFill>
-        <p:spPr>
-          <a:xfrm>
-            <a:off x="733407" y="693348"/>
-            <a:ext cx="384048" cy="384048"/>
-          </a:xfrm>
-          <a:prstGeom prst="rect">
-            <a:avLst/>
-          </a:prstGeom>
-        </p:spPr>
-      </p:pic>
+      <p:sp>
+        <p:nvSpPr>
+          <p:cNvPr id="19" name="Text 1">
+            <a:extLst>
+              <a:ext uri="{FF2B5EF4-FFF2-40B4-BE49-F238E27FC236}">
+                <a16:creationId xmlns:a16="http://schemas.microsoft.com/office/drawing/2014/main" id="{585E3AF8-BAB8-6757-6223-79CC8147C286}"/>
+              </a:ext>
+            </a:extLst>
+          </p:cNvPr>
+          <p:cNvSpPr/>
+          <p:nvPr/>
+        </p:nvSpPr>
+        <p:spPr>
+          <a:xfrm>
+            <a:off x="792328" y="515112"/>
+            <a:ext cx="9784080" cy="320040"/>
+          </a:xfrm>
+          <a:prstGeom prst="rect">
+            <a:avLst/>
+          </a:prstGeom>
+          <a:noFill/>
+          <a:ln/>
+        </p:spPr>
+        <p:txBody>
+          <a:bodyPr wrap="square" rtlCol="0" anchor="ctr"/>
+          <a:lstStyle/>
+          <a:p>
+            <a:r>
+              <a:rPr lang="en-US" altLang="zh-TW" sz="1200" b="1" kern="0" spc="100" dirty="0">
+                <a:solidFill>
+                  <a:srgbClr val="CC6600"/>
+                </a:solidFill>
+                <a:latin typeface="微軟正黑體" panose="020B0604030504040204" pitchFamily="34" charset="-120"/>
+                <a:ea typeface="微軟正黑體" panose="020B0604030504040204" pitchFamily="34" charset="-120"/>
+                <a:cs typeface="Calibri" pitchFamily="34" charset="-120"/>
+              </a:rPr>
+              <a:t>SHIPPING ORDER (SO)</a:t>
+            </a:r>
+          </a:p>
+        </p:txBody>
+      </p:sp>
+      <p:sp>
+        <p:nvSpPr>
+          <p:cNvPr id="21" name="Text 2">
+            <a:extLst>
+              <a:ext uri="{FF2B5EF4-FFF2-40B4-BE49-F238E27FC236}">
+                <a16:creationId xmlns:a16="http://schemas.microsoft.com/office/drawing/2014/main" id="{9A36D065-CE95-BAE8-6565-2C26497E7204}"/>
+              </a:ext>
+            </a:extLst>
+          </p:cNvPr>
+          <p:cNvSpPr/>
+          <p:nvPr/>
+        </p:nvSpPr>
+        <p:spPr>
+          <a:xfrm>
+            <a:off x="792328" y="823976"/>
+            <a:ext cx="10241280" cy="548640"/>
+          </a:xfrm>
+          <a:prstGeom prst="rect">
+            <a:avLst/>
+          </a:prstGeom>
+          <a:noFill/>
+          <a:ln/>
+        </p:spPr>
+        <p:txBody>
+          <a:bodyPr wrap="square" rtlCol="0" anchor="ctr"/>
+          <a:lstStyle/>
+          <a:p>
+            <a:r>
+              <a:rPr lang="zh-TW" altLang="en-US" sz="2800" b="1" dirty="0">
+                <a:solidFill>
+                  <a:srgbClr val="1E293B"/>
+                </a:solidFill>
+                <a:latin typeface="微軟正黑體" panose="020B0604030504040204" pitchFamily="34" charset="-120"/>
+                <a:ea typeface="微軟正黑體" panose="020B0604030504040204" pitchFamily="34" charset="-120"/>
+                <a:cs typeface="Cambria" pitchFamily="34" charset="-120"/>
+              </a:rPr>
+              <a:t>銷貨出貨單</a:t>
+            </a:r>
+          </a:p>
+        </p:txBody>
+      </p:sp>
     </p:spTree>
     <p:extLst>
       <p:ext uri="{BB962C8B-B14F-4D97-AF65-F5344CB8AC3E}">
@@ -13474,94 +13162,6 @@
       </p:sp>
       <p:sp>
         <p:nvSpPr>
-          <p:cNvPr id="3" name="Text 1">
-            <a:extLst>
-              <a:ext uri="{FF2B5EF4-FFF2-40B4-BE49-F238E27FC236}">
-                <a16:creationId xmlns:a16="http://schemas.microsoft.com/office/drawing/2014/main" id="{6D201932-0185-7F57-888E-6E0D26D45F1A}"/>
-              </a:ext>
-            </a:extLst>
-          </p:cNvPr>
-          <p:cNvSpPr/>
-          <p:nvPr/>
-        </p:nvSpPr>
-        <p:spPr>
-          <a:xfrm>
-            <a:off x="1432408" y="452628"/>
-            <a:ext cx="9144000" cy="320040"/>
-          </a:xfrm>
-          <a:prstGeom prst="rect">
-            <a:avLst/>
-          </a:prstGeom>
-          <a:noFill/>
-          <a:ln/>
-        </p:spPr>
-        <p:txBody>
-          <a:bodyPr wrap="square" rtlCol="0" anchor="ctr"/>
-          <a:lstStyle/>
-          <a:p>
-            <a:pPr marL="0" indent="0">
-              <a:buNone/>
-            </a:pPr>
-            <a:r>
-              <a:rPr lang="en-US" sz="1300" b="1" kern="0" spc="100" dirty="0">
-                <a:solidFill>
-                  <a:srgbClr val="CC6600"/>
-                </a:solidFill>
-                <a:latin typeface="微軟正黑體" panose="020B0604030504040204" pitchFamily="34" charset="-120"/>
-                <a:ea typeface="微軟正黑體" panose="020B0604030504040204" pitchFamily="34" charset="-120"/>
-                <a:cs typeface="Calibri" pitchFamily="34" charset="-120"/>
-              </a:rPr>
-              <a:t>ACCOUNTS RECEIVABLE</a:t>
-            </a:r>
-          </a:p>
-        </p:txBody>
-      </p:sp>
-      <p:sp>
-        <p:nvSpPr>
-          <p:cNvPr id="4" name="Text 2">
-            <a:extLst>
-              <a:ext uri="{FF2B5EF4-FFF2-40B4-BE49-F238E27FC236}">
-                <a16:creationId xmlns:a16="http://schemas.microsoft.com/office/drawing/2014/main" id="{0608804D-AB7A-4814-DE7E-6DD16411DE69}"/>
-              </a:ext>
-            </a:extLst>
-          </p:cNvPr>
-          <p:cNvSpPr/>
-          <p:nvPr/>
-        </p:nvSpPr>
-        <p:spPr>
-          <a:xfrm>
-            <a:off x="1432408" y="722376"/>
-            <a:ext cx="9601200" cy="548640"/>
-          </a:xfrm>
-          <a:prstGeom prst="rect">
-            <a:avLst/>
-          </a:prstGeom>
-          <a:noFill/>
-          <a:ln/>
-        </p:spPr>
-        <p:txBody>
-          <a:bodyPr wrap="square" rtlCol="0" anchor="ctr"/>
-          <a:lstStyle/>
-          <a:p>
-            <a:pPr marL="0" indent="0">
-              <a:buNone/>
-            </a:pPr>
-            <a:r>
-              <a:rPr lang="zh-TW" altLang="en-US" sz="2800" b="1" dirty="0">
-                <a:solidFill>
-                  <a:srgbClr val="1E293B"/>
-                </a:solidFill>
-                <a:latin typeface="微軟正黑體" panose="020B0604030504040204" pitchFamily="34" charset="-120"/>
-                <a:ea typeface="微軟正黑體" panose="020B0604030504040204" pitchFamily="34" charset="-120"/>
-                <a:cs typeface="Cambria" pitchFamily="34" charset="-120"/>
-              </a:rPr>
-              <a:t>應收款項</a:t>
-            </a:r>
-          </a:p>
-        </p:txBody>
-      </p:sp>
-      <p:sp>
-        <p:nvSpPr>
           <p:cNvPr id="5" name="Shape 3">
             <a:extLst>
               <a:ext uri="{FF2B5EF4-FFF2-40B4-BE49-F238E27FC236}">
@@ -13963,36 +13563,88 @@
           </a:p>
         </p:txBody>
       </p:sp>
-      <p:pic>
-        <p:nvPicPr>
-          <p:cNvPr id="17" name="Image 3" descr="preencoded.png">
-            <a:extLst>
-              <a:ext uri="{FF2B5EF4-FFF2-40B4-BE49-F238E27FC236}">
-                <a16:creationId xmlns:a16="http://schemas.microsoft.com/office/drawing/2014/main" id="{589B457C-F2AB-0B09-35BD-AFB11252912B}"/>
-              </a:ext>
-            </a:extLst>
-          </p:cNvPr>
-          <p:cNvPicPr>
-            <a:picLocks noChangeAspect="1"/>
-          </p:cNvPicPr>
-          <p:nvPr/>
-        </p:nvPicPr>
-        <p:blipFill>
-          <a:blip r:embed="rId2"/>
-          <a:stretch>
-            <a:fillRect/>
-          </a:stretch>
-        </p:blipFill>
-        <p:spPr>
-          <a:xfrm>
-            <a:off x="727920" y="642823"/>
-            <a:ext cx="395021" cy="395021"/>
-          </a:xfrm>
-          <a:prstGeom prst="rect">
-            <a:avLst/>
-          </a:prstGeom>
-        </p:spPr>
-      </p:pic>
+      <p:sp>
+        <p:nvSpPr>
+          <p:cNvPr id="12" name="Text 1">
+            <a:extLst>
+              <a:ext uri="{FF2B5EF4-FFF2-40B4-BE49-F238E27FC236}">
+                <a16:creationId xmlns:a16="http://schemas.microsoft.com/office/drawing/2014/main" id="{9BF279BB-47AA-8820-2F79-ADD4094C17CD}"/>
+              </a:ext>
+            </a:extLst>
+          </p:cNvPr>
+          <p:cNvSpPr/>
+          <p:nvPr/>
+        </p:nvSpPr>
+        <p:spPr>
+          <a:xfrm>
+            <a:off x="792328" y="515112"/>
+            <a:ext cx="9784080" cy="320040"/>
+          </a:xfrm>
+          <a:prstGeom prst="rect">
+            <a:avLst/>
+          </a:prstGeom>
+          <a:noFill/>
+          <a:ln/>
+        </p:spPr>
+        <p:txBody>
+          <a:bodyPr wrap="square" rtlCol="0" anchor="ctr"/>
+          <a:lstStyle/>
+          <a:p>
+            <a:r>
+              <a:rPr lang="en-US" altLang="zh-TW" sz="1200" b="1" kern="0" spc="100" dirty="0">
+                <a:solidFill>
+                  <a:srgbClr val="CC6600"/>
+                </a:solidFill>
+                <a:latin typeface="微軟正黑體" panose="020B0604030504040204" pitchFamily="34" charset="-120"/>
+                <a:ea typeface="微軟正黑體" panose="020B0604030504040204" pitchFamily="34" charset="-120"/>
+                <a:cs typeface="Calibri" pitchFamily="34" charset="-120"/>
+              </a:rPr>
+              <a:t>ACCOUNTS RECEIVABLE</a:t>
+            </a:r>
+          </a:p>
+        </p:txBody>
+      </p:sp>
+      <p:sp>
+        <p:nvSpPr>
+          <p:cNvPr id="18" name="Text 2">
+            <a:extLst>
+              <a:ext uri="{FF2B5EF4-FFF2-40B4-BE49-F238E27FC236}">
+                <a16:creationId xmlns:a16="http://schemas.microsoft.com/office/drawing/2014/main" id="{27C1F3B8-E66E-7FDA-010E-72DD12E4A16B}"/>
+              </a:ext>
+            </a:extLst>
+          </p:cNvPr>
+          <p:cNvSpPr/>
+          <p:nvPr/>
+        </p:nvSpPr>
+        <p:spPr>
+          <a:xfrm>
+            <a:off x="792328" y="823976"/>
+            <a:ext cx="10241280" cy="548640"/>
+          </a:xfrm>
+          <a:prstGeom prst="rect">
+            <a:avLst/>
+          </a:prstGeom>
+          <a:noFill/>
+          <a:ln/>
+        </p:spPr>
+        <p:txBody>
+          <a:bodyPr wrap="square" rtlCol="0" anchor="ctr"/>
+          <a:lstStyle/>
+          <a:p>
+            <a:r>
+              <a:rPr lang="zh-TW" altLang="en-US" sz="2800" b="1" dirty="0">
+                <a:solidFill>
+                  <a:srgbClr val="1E293B"/>
+                </a:solidFill>
+                <a:latin typeface="微軟正黑體" panose="020B0604030504040204" pitchFamily="34" charset="-120"/>
+                <a:ea typeface="微軟正黑體" panose="020B0604030504040204" pitchFamily="34" charset="-120"/>
+                <a:cs typeface="Cambria" pitchFamily="34" charset="-120"/>
+              </a:rPr>
+              <a:t>應收款項</a:t>
+            </a:r>
+          </a:p>
+        </p:txBody>
+      </p:sp>
     </p:spTree>
     <p:extLst>
       <p:ext uri="{BB962C8B-B14F-4D97-AF65-F5344CB8AC3E}">
